--- a/lectures/lecture20_21/sorting.pptx
+++ b/lectures/lecture20_21/sorting.pptx
@@ -134,7 +134,7 @@
 <file path=ppt/revisionInfo.xml><?xml version="1.0" encoding="utf-8"?>
 <p1510:revInfo xmlns:a="http://schemas.openxmlformats.org/drawingml/2006/main" xmlns:r="http://schemas.openxmlformats.org/officeDocument/2006/relationships" xmlns:p1510="http://schemas.microsoft.com/office/powerpoint/2015/10/main">
   <p1510:revLst>
-    <p1510:client id="{70D2DAD8-E89F-AC41-B3EB-40B243B3DD5F}" v="477" dt="2026-07-01T06:02:59.496"/>
+    <p1510:client id="{70D2DAD8-E89F-AC41-B3EB-40B243B3DD5F}" v="503" dt="2026-07-02T17:21:27.525"/>
   </p1510:revLst>
 </p1510:revInfo>
 </file>
@@ -144,7 +144,7 @@
   <pc:docChgLst>
     <pc:chgData name="Toby Donaldson" userId="2e6e5431-bb17-4c41-9985-d39c50d83c73" providerId="ADAL" clId="{F31BC264-820E-54C4-A6D1-F92AF9CC222E}"/>
     <pc:docChg chg="undo custSel addSld delSld modSld">
-      <pc:chgData name="Toby Donaldson" userId="2e6e5431-bb17-4c41-9985-d39c50d83c73" providerId="ADAL" clId="{F31BC264-820E-54C4-A6D1-F92AF9CC222E}" dt="2026-07-02T16:53:55.920" v="11819" actId="20577"/>
+      <pc:chgData name="Toby Donaldson" userId="2e6e5431-bb17-4c41-9985-d39c50d83c73" providerId="ADAL" clId="{F31BC264-820E-54C4-A6D1-F92AF9CC222E}" dt="2026-07-02T18:49:58.272" v="12000" actId="20577"/>
       <pc:docMkLst>
         <pc:docMk/>
       </pc:docMkLst>
@@ -233,7 +233,7 @@
         </pc:spChg>
       </pc:sldChg>
       <pc:sldChg chg="addSp modSp new mod">
-        <pc:chgData name="Toby Donaldson" userId="2e6e5431-bb17-4c41-9985-d39c50d83c73" providerId="ADAL" clId="{F31BC264-820E-54C4-A6D1-F92AF9CC222E}" dt="2026-07-01T03:31:21.833" v="4926" actId="20577"/>
+        <pc:chgData name="Toby Donaldson" userId="2e6e5431-bb17-4c41-9985-d39c50d83c73" providerId="ADAL" clId="{F31BC264-820E-54C4-A6D1-F92AF9CC222E}" dt="2026-07-02T17:09:56.192" v="11821"/>
         <pc:sldMkLst>
           <pc:docMk/>
           <pc:sldMk cId="3199184259" sldId="259"/>
@@ -247,7 +247,7 @@
           </ac:spMkLst>
         </pc:spChg>
         <pc:spChg chg="mod">
-          <ac:chgData name="Toby Donaldson" userId="2e6e5431-bb17-4c41-9985-d39c50d83c73" providerId="ADAL" clId="{F31BC264-820E-54C4-A6D1-F92AF9CC222E}" dt="2026-07-01T02:52:25.644" v="2110" actId="14100"/>
+          <ac:chgData name="Toby Donaldson" userId="2e6e5431-bb17-4c41-9985-d39c50d83c73" providerId="ADAL" clId="{F31BC264-820E-54C4-A6D1-F92AF9CC222E}" dt="2026-07-02T17:09:32.879" v="11820" actId="20577"/>
           <ac:spMkLst>
             <pc:docMk/>
             <pc:sldMk cId="3199184259" sldId="259"/>
@@ -319,7 +319,7 @@
           </ac:spMkLst>
         </pc:spChg>
         <pc:spChg chg="add mod">
-          <ac:chgData name="Toby Donaldson" userId="2e6e5431-bb17-4c41-9985-d39c50d83c73" providerId="ADAL" clId="{F31BC264-820E-54C4-A6D1-F92AF9CC222E}" dt="2026-07-01T03:31:21.833" v="4926" actId="20577"/>
+          <ac:chgData name="Toby Donaldson" userId="2e6e5431-bb17-4c41-9985-d39c50d83c73" providerId="ADAL" clId="{F31BC264-820E-54C4-A6D1-F92AF9CC222E}" dt="2026-07-02T17:09:56.192" v="11821"/>
           <ac:spMkLst>
             <pc:docMk/>
             <pc:sldMk cId="3199184259" sldId="259"/>
@@ -365,7 +365,7 @@
         </pc:sldMkLst>
       </pc:sldChg>
       <pc:sldChg chg="modSp new mod">
-        <pc:chgData name="Toby Donaldson" userId="2e6e5431-bb17-4c41-9985-d39c50d83c73" providerId="ADAL" clId="{F31BC264-820E-54C4-A6D1-F92AF9CC222E}" dt="2026-07-01T03:06:23.290" v="3867" actId="20577"/>
+        <pc:chgData name="Toby Donaldson" userId="2e6e5431-bb17-4c41-9985-d39c50d83c73" providerId="ADAL" clId="{F31BC264-820E-54C4-A6D1-F92AF9CC222E}" dt="2026-07-02T17:10:32.103" v="11825" actId="20577"/>
         <pc:sldMkLst>
           <pc:docMk/>
           <pc:sldMk cId="290959236" sldId="261"/>
@@ -379,7 +379,7 @@
           </ac:spMkLst>
         </pc:spChg>
         <pc:spChg chg="mod">
-          <ac:chgData name="Toby Donaldson" userId="2e6e5431-bb17-4c41-9985-d39c50d83c73" providerId="ADAL" clId="{F31BC264-820E-54C4-A6D1-F92AF9CC222E}" dt="2026-07-01T03:06:23.290" v="3867" actId="20577"/>
+          <ac:chgData name="Toby Donaldson" userId="2e6e5431-bb17-4c41-9985-d39c50d83c73" providerId="ADAL" clId="{F31BC264-820E-54C4-A6D1-F92AF9CC222E}" dt="2026-07-02T17:10:32.103" v="11825" actId="20577"/>
           <ac:spMkLst>
             <pc:docMk/>
             <pc:sldMk cId="290959236" sldId="261"/>
@@ -395,7 +395,7 @@
         </pc:sldMkLst>
       </pc:sldChg>
       <pc:sldChg chg="modSp new mod">
-        <pc:chgData name="Toby Donaldson" userId="2e6e5431-bb17-4c41-9985-d39c50d83c73" providerId="ADAL" clId="{F31BC264-820E-54C4-A6D1-F92AF9CC222E}" dt="2026-07-01T03:08:42.369" v="4297" actId="113"/>
+        <pc:chgData name="Toby Donaldson" userId="2e6e5431-bb17-4c41-9985-d39c50d83c73" providerId="ADAL" clId="{F31BC264-820E-54C4-A6D1-F92AF9CC222E}" dt="2026-07-02T17:11:18.406" v="11829" actId="20577"/>
         <pc:sldMkLst>
           <pc:docMk/>
           <pc:sldMk cId="829845940" sldId="262"/>
@@ -409,7 +409,7 @@
           </ac:spMkLst>
         </pc:spChg>
         <pc:spChg chg="mod">
-          <ac:chgData name="Toby Donaldson" userId="2e6e5431-bb17-4c41-9985-d39c50d83c73" providerId="ADAL" clId="{F31BC264-820E-54C4-A6D1-F92AF9CC222E}" dt="2026-07-01T03:08:42.369" v="4297" actId="113"/>
+          <ac:chgData name="Toby Donaldson" userId="2e6e5431-bb17-4c41-9985-d39c50d83c73" providerId="ADAL" clId="{F31BC264-820E-54C4-A6D1-F92AF9CC222E}" dt="2026-07-02T17:11:18.406" v="11829" actId="20577"/>
           <ac:spMkLst>
             <pc:docMk/>
             <pc:sldMk cId="829845940" sldId="262"/>
@@ -432,7 +432,7 @@
         </pc:sldMkLst>
       </pc:sldChg>
       <pc:sldChg chg="addSp delSp modSp new mod">
-        <pc:chgData name="Toby Donaldson" userId="2e6e5431-bb17-4c41-9985-d39c50d83c73" providerId="ADAL" clId="{F31BC264-820E-54C4-A6D1-F92AF9CC222E}" dt="2026-07-01T03:39:37.054" v="5885" actId="1076"/>
+        <pc:chgData name="Toby Donaldson" userId="2e6e5431-bb17-4c41-9985-d39c50d83c73" providerId="ADAL" clId="{F31BC264-820E-54C4-A6D1-F92AF9CC222E}" dt="2026-07-02T17:12:26.992" v="11851" actId="20577"/>
         <pc:sldMkLst>
           <pc:docMk/>
           <pc:sldMk cId="2317800348" sldId="263"/>
@@ -446,7 +446,7 @@
           </ac:spMkLst>
         </pc:spChg>
         <pc:spChg chg="mod">
-          <ac:chgData name="Toby Donaldson" userId="2e6e5431-bb17-4c41-9985-d39c50d83c73" providerId="ADAL" clId="{F31BC264-820E-54C4-A6D1-F92AF9CC222E}" dt="2026-07-01T03:39:02.799" v="5880"/>
+          <ac:chgData name="Toby Donaldson" userId="2e6e5431-bb17-4c41-9985-d39c50d83c73" providerId="ADAL" clId="{F31BC264-820E-54C4-A6D1-F92AF9CC222E}" dt="2026-07-02T17:12:26.992" v="11851" actId="20577"/>
           <ac:spMkLst>
             <pc:docMk/>
             <pc:sldMk cId="2317800348" sldId="263"/>
@@ -478,7 +478,7 @@
         </pc:sldMkLst>
       </pc:sldChg>
       <pc:sldChg chg="addSp delSp modSp new mod">
-        <pc:chgData name="Toby Donaldson" userId="2e6e5431-bb17-4c41-9985-d39c50d83c73" providerId="ADAL" clId="{F31BC264-820E-54C4-A6D1-F92AF9CC222E}" dt="2026-07-01T03:34:59.831" v="5584" actId="20577"/>
+        <pc:chgData name="Toby Donaldson" userId="2e6e5431-bb17-4c41-9985-d39c50d83c73" providerId="ADAL" clId="{F31BC264-820E-54C4-A6D1-F92AF9CC222E}" dt="2026-07-02T17:13:32.844" v="11868" actId="20577"/>
         <pc:sldMkLst>
           <pc:docMk/>
           <pc:sldMk cId="1936074923" sldId="264"/>
@@ -492,7 +492,7 @@
           </ac:spMkLst>
         </pc:spChg>
         <pc:spChg chg="mod">
-          <ac:chgData name="Toby Donaldson" userId="2e6e5431-bb17-4c41-9985-d39c50d83c73" providerId="ADAL" clId="{F31BC264-820E-54C4-A6D1-F92AF9CC222E}" dt="2026-07-01T03:30:32.542" v="4918" actId="20577"/>
+          <ac:chgData name="Toby Donaldson" userId="2e6e5431-bb17-4c41-9985-d39c50d83c73" providerId="ADAL" clId="{F31BC264-820E-54C4-A6D1-F92AF9CC222E}" dt="2026-07-02T17:13:32.844" v="11868" actId="20577"/>
           <ac:spMkLst>
             <pc:docMk/>
             <pc:sldMk cId="1936074923" sldId="264"/>
@@ -668,7 +668,7 @@
         </pc:sldMkLst>
       </pc:sldChg>
       <pc:sldChg chg="modSp new mod">
-        <pc:chgData name="Toby Donaldson" userId="2e6e5431-bb17-4c41-9985-d39c50d83c73" providerId="ADAL" clId="{F31BC264-820E-54C4-A6D1-F92AF9CC222E}" dt="2026-07-01T03:38:02.180" v="5870" actId="113"/>
+        <pc:chgData name="Toby Donaldson" userId="2e6e5431-bb17-4c41-9985-d39c50d83c73" providerId="ADAL" clId="{F31BC264-820E-54C4-A6D1-F92AF9CC222E}" dt="2026-07-02T17:15:06.647" v="11887"/>
         <pc:sldMkLst>
           <pc:docMk/>
           <pc:sldMk cId="4179708731" sldId="265"/>
@@ -682,7 +682,7 @@
           </ac:spMkLst>
         </pc:spChg>
         <pc:spChg chg="mod">
-          <ac:chgData name="Toby Donaldson" userId="2e6e5431-bb17-4c41-9985-d39c50d83c73" providerId="ADAL" clId="{F31BC264-820E-54C4-A6D1-F92AF9CC222E}" dt="2026-07-01T03:38:02.180" v="5870" actId="113"/>
+          <ac:chgData name="Toby Donaldson" userId="2e6e5431-bb17-4c41-9985-d39c50d83c73" providerId="ADAL" clId="{F31BC264-820E-54C4-A6D1-F92AF9CC222E}" dt="2026-07-02T17:15:06.647" v="11887"/>
           <ac:spMkLst>
             <pc:docMk/>
             <pc:sldMk cId="4179708731" sldId="265"/>
@@ -774,7 +774,7 @@
         </pc:sldMkLst>
       </pc:sldChg>
       <pc:sldChg chg="addSp modSp new mod">
-        <pc:chgData name="Toby Donaldson" userId="2e6e5431-bb17-4c41-9985-d39c50d83c73" providerId="ADAL" clId="{F31BC264-820E-54C4-A6D1-F92AF9CC222E}" dt="2026-07-01T03:53:26.880" v="7644" actId="1076"/>
+        <pc:chgData name="Toby Donaldson" userId="2e6e5431-bb17-4c41-9985-d39c50d83c73" providerId="ADAL" clId="{F31BC264-820E-54C4-A6D1-F92AF9CC222E}" dt="2026-07-02T17:16:11.685" v="11889" actId="113"/>
         <pc:sldMkLst>
           <pc:docMk/>
           <pc:sldMk cId="2956004562" sldId="268"/>
@@ -788,7 +788,7 @@
           </ac:spMkLst>
         </pc:spChg>
         <pc:spChg chg="mod">
-          <ac:chgData name="Toby Donaldson" userId="2e6e5431-bb17-4c41-9985-d39c50d83c73" providerId="ADAL" clId="{F31BC264-820E-54C4-A6D1-F92AF9CC222E}" dt="2026-07-01T03:51:53.664" v="7532" actId="122"/>
+          <ac:chgData name="Toby Donaldson" userId="2e6e5431-bb17-4c41-9985-d39c50d83c73" providerId="ADAL" clId="{F31BC264-820E-54C4-A6D1-F92AF9CC222E}" dt="2026-07-02T17:16:11.685" v="11889" actId="113"/>
           <ac:spMkLst>
             <pc:docMk/>
             <pc:sldMk cId="2956004562" sldId="268"/>
@@ -819,8 +819,8 @@
           <pc:sldMk cId="2491235032" sldId="269"/>
         </pc:sldMkLst>
       </pc:sldChg>
-      <pc:sldChg chg="modSp new mod">
-        <pc:chgData name="Toby Donaldson" userId="2e6e5431-bb17-4c41-9985-d39c50d83c73" providerId="ADAL" clId="{F31BC264-820E-54C4-A6D1-F92AF9CC222E}" dt="2026-07-01T03:55:29.587" v="7691" actId="20577"/>
+      <pc:sldChg chg="addSp modSp new mod">
+        <pc:chgData name="Toby Donaldson" userId="2e6e5431-bb17-4c41-9985-d39c50d83c73" providerId="ADAL" clId="{F31BC264-820E-54C4-A6D1-F92AF9CC222E}" dt="2026-07-02T17:19:18.203" v="11942" actId="20577"/>
         <pc:sldMkLst>
           <pc:docMk/>
           <pc:sldMk cId="3011741837" sldId="269"/>
@@ -834,11 +834,51 @@
           </ac:spMkLst>
         </pc:spChg>
         <pc:spChg chg="mod">
-          <ac:chgData name="Toby Donaldson" userId="2e6e5431-bb17-4c41-9985-d39c50d83c73" providerId="ADAL" clId="{F31BC264-820E-54C4-A6D1-F92AF9CC222E}" dt="2026-07-01T03:55:29.587" v="7691" actId="20577"/>
+          <ac:chgData name="Toby Donaldson" userId="2e6e5431-bb17-4c41-9985-d39c50d83c73" providerId="ADAL" clId="{F31BC264-820E-54C4-A6D1-F92AF9CC222E}" dt="2026-07-02T17:19:18.203" v="11942" actId="20577"/>
           <ac:spMkLst>
             <pc:docMk/>
             <pc:sldMk cId="3011741837" sldId="269"/>
             <ac:spMk id="3" creationId="{F35E98CC-37C6-5C2C-80AD-E2993785D695}"/>
+          </ac:spMkLst>
+        </pc:spChg>
+        <pc:spChg chg="add mod">
+          <ac:chgData name="Toby Donaldson" userId="2e6e5431-bb17-4c41-9985-d39c50d83c73" providerId="ADAL" clId="{F31BC264-820E-54C4-A6D1-F92AF9CC222E}" dt="2026-07-02T17:16:59.646" v="11891" actId="1076"/>
+          <ac:spMkLst>
+            <pc:docMk/>
+            <pc:sldMk cId="3011741837" sldId="269"/>
+            <ac:spMk id="4" creationId="{20066896-B762-94D3-2C9F-A37E7A2E4C0F}"/>
+          </ac:spMkLst>
+        </pc:spChg>
+        <pc:spChg chg="add mod">
+          <ac:chgData name="Toby Donaldson" userId="2e6e5431-bb17-4c41-9985-d39c50d83c73" providerId="ADAL" clId="{F31BC264-820E-54C4-A6D1-F92AF9CC222E}" dt="2026-07-02T17:17:14.151" v="11895" actId="692"/>
+          <ac:spMkLst>
+            <pc:docMk/>
+            <pc:sldMk cId="3011741837" sldId="269"/>
+            <ac:spMk id="5" creationId="{4C96CBCE-517F-8F94-6E2F-BE58FD93C3B3}"/>
+          </ac:spMkLst>
+        </pc:spChg>
+        <pc:spChg chg="add mod">
+          <ac:chgData name="Toby Donaldson" userId="2e6e5431-bb17-4c41-9985-d39c50d83c73" providerId="ADAL" clId="{F31BC264-820E-54C4-A6D1-F92AF9CC222E}" dt="2026-07-02T17:17:26.529" v="11897" actId="1076"/>
+          <ac:spMkLst>
+            <pc:docMk/>
+            <pc:sldMk cId="3011741837" sldId="269"/>
+            <ac:spMk id="6" creationId="{AB5F44AE-DA8E-CB91-605C-8EFEC4986426}"/>
+          </ac:spMkLst>
+        </pc:spChg>
+        <pc:spChg chg="add mod">
+          <ac:chgData name="Toby Donaldson" userId="2e6e5431-bb17-4c41-9985-d39c50d83c73" providerId="ADAL" clId="{F31BC264-820E-54C4-A6D1-F92AF9CC222E}" dt="2026-07-02T17:18:22.239" v="11912" actId="1076"/>
+          <ac:spMkLst>
+            <pc:docMk/>
+            <pc:sldMk cId="3011741837" sldId="269"/>
+            <ac:spMk id="7" creationId="{05104D77-40E6-F6EA-FC58-6606F909BCBD}"/>
+          </ac:spMkLst>
+        </pc:spChg>
+        <pc:spChg chg="add mod">
+          <ac:chgData name="Toby Donaldson" userId="2e6e5431-bb17-4c41-9985-d39c50d83c73" providerId="ADAL" clId="{F31BC264-820E-54C4-A6D1-F92AF9CC222E}" dt="2026-07-02T17:18:22.239" v="11912" actId="1076"/>
+          <ac:spMkLst>
+            <pc:docMk/>
+            <pc:sldMk cId="3011741837" sldId="269"/>
+            <ac:spMk id="8" creationId="{3806EE62-44D5-530D-3D00-EEBC02B6F8FF}"/>
           </ac:spMkLst>
         </pc:spChg>
       </pc:sldChg>
@@ -850,7 +890,7 @@
         </pc:sldMkLst>
       </pc:sldChg>
       <pc:sldChg chg="addSp modSp new mod">
-        <pc:chgData name="Toby Donaldson" userId="2e6e5431-bb17-4c41-9985-d39c50d83c73" providerId="ADAL" clId="{F31BC264-820E-54C4-A6D1-F92AF9CC222E}" dt="2026-07-01T04:02:24.453" v="8084"/>
+        <pc:chgData name="Toby Donaldson" userId="2e6e5431-bb17-4c41-9985-d39c50d83c73" providerId="ADAL" clId="{F31BC264-820E-54C4-A6D1-F92AF9CC222E}" dt="2026-07-02T17:20:52.456" v="11980" actId="20577"/>
         <pc:sldMkLst>
           <pc:docMk/>
           <pc:sldMk cId="3791056666" sldId="270"/>
@@ -864,7 +904,7 @@
           </ac:spMkLst>
         </pc:spChg>
         <pc:spChg chg="mod">
-          <ac:chgData name="Toby Donaldson" userId="2e6e5431-bb17-4c41-9985-d39c50d83c73" providerId="ADAL" clId="{F31BC264-820E-54C4-A6D1-F92AF9CC222E}" dt="2026-07-01T03:58:37.989" v="7910" actId="20577"/>
+          <ac:chgData name="Toby Donaldson" userId="2e6e5431-bb17-4c41-9985-d39c50d83c73" providerId="ADAL" clId="{F31BC264-820E-54C4-A6D1-F92AF9CC222E}" dt="2026-07-02T17:20:08.646" v="11968" actId="20577"/>
           <ac:spMkLst>
             <pc:docMk/>
             <pc:sldMk cId="3791056666" sldId="270"/>
@@ -872,7 +912,7 @@
           </ac:spMkLst>
         </pc:spChg>
         <pc:spChg chg="add mod">
-          <ac:chgData name="Toby Donaldson" userId="2e6e5431-bb17-4c41-9985-d39c50d83c73" providerId="ADAL" clId="{F31BC264-820E-54C4-A6D1-F92AF9CC222E}" dt="2026-07-01T03:58:07.790" v="7874" actId="1076"/>
+          <ac:chgData name="Toby Donaldson" userId="2e6e5431-bb17-4c41-9985-d39c50d83c73" providerId="ADAL" clId="{F31BC264-820E-54C4-A6D1-F92AF9CC222E}" dt="2026-07-02T17:20:22.057" v="11969" actId="20577"/>
           <ac:spMkLst>
             <pc:docMk/>
             <pc:sldMk cId="3791056666" sldId="270"/>
@@ -880,7 +920,7 @@
           </ac:spMkLst>
         </pc:spChg>
         <pc:spChg chg="add mod">
-          <ac:chgData name="Toby Donaldson" userId="2e6e5431-bb17-4c41-9985-d39c50d83c73" providerId="ADAL" clId="{F31BC264-820E-54C4-A6D1-F92AF9CC222E}" dt="2026-07-01T04:02:24.453" v="8084"/>
+          <ac:chgData name="Toby Donaldson" userId="2e6e5431-bb17-4c41-9985-d39c50d83c73" providerId="ADAL" clId="{F31BC264-820E-54C4-A6D1-F92AF9CC222E}" dt="2026-07-02T17:20:52.456" v="11980" actId="20577"/>
           <ac:spMkLst>
             <pc:docMk/>
             <pc:sldMk cId="3791056666" sldId="270"/>
@@ -897,7 +937,7 @@
         </pc:cxnChg>
       </pc:sldChg>
       <pc:sldChg chg="modSp new mod">
-        <pc:chgData name="Toby Donaldson" userId="2e6e5431-bb17-4c41-9985-d39c50d83c73" providerId="ADAL" clId="{F31BC264-820E-54C4-A6D1-F92AF9CC222E}" dt="2026-07-01T04:06:52.612" v="8771" actId="113"/>
+        <pc:chgData name="Toby Donaldson" userId="2e6e5431-bb17-4c41-9985-d39c50d83c73" providerId="ADAL" clId="{F31BC264-820E-54C4-A6D1-F92AF9CC222E}" dt="2026-07-02T17:21:44.399" v="11990" actId="113"/>
         <pc:sldMkLst>
           <pc:docMk/>
           <pc:sldMk cId="3014209956" sldId="271"/>
@@ -911,7 +951,7 @@
           </ac:spMkLst>
         </pc:spChg>
         <pc:spChg chg="mod">
-          <ac:chgData name="Toby Donaldson" userId="2e6e5431-bb17-4c41-9985-d39c50d83c73" providerId="ADAL" clId="{F31BC264-820E-54C4-A6D1-F92AF9CC222E}" dt="2026-07-01T04:06:52.612" v="8771" actId="113"/>
+          <ac:chgData name="Toby Donaldson" userId="2e6e5431-bb17-4c41-9985-d39c50d83c73" providerId="ADAL" clId="{F31BC264-820E-54C4-A6D1-F92AF9CC222E}" dt="2026-07-02T17:21:44.399" v="11990" actId="113"/>
           <ac:spMkLst>
             <pc:docMk/>
             <pc:sldMk cId="3014209956" sldId="271"/>
@@ -927,7 +967,7 @@
         </pc:sldMkLst>
       </pc:sldChg>
       <pc:sldChg chg="modSp new mod">
-        <pc:chgData name="Toby Donaldson" userId="2e6e5431-bb17-4c41-9985-d39c50d83c73" providerId="ADAL" clId="{F31BC264-820E-54C4-A6D1-F92AF9CC222E}" dt="2026-07-01T04:13:40.172" v="9774" actId="113"/>
+        <pc:chgData name="Toby Donaldson" userId="2e6e5431-bb17-4c41-9985-d39c50d83c73" providerId="ADAL" clId="{F31BC264-820E-54C4-A6D1-F92AF9CC222E}" dt="2026-07-02T17:22:42.224" v="11999" actId="20577"/>
         <pc:sldMkLst>
           <pc:docMk/>
           <pc:sldMk cId="1685373950" sldId="272"/>
@@ -941,7 +981,7 @@
           </ac:spMkLst>
         </pc:spChg>
         <pc:spChg chg="mod">
-          <ac:chgData name="Toby Donaldson" userId="2e6e5431-bb17-4c41-9985-d39c50d83c73" providerId="ADAL" clId="{F31BC264-820E-54C4-A6D1-F92AF9CC222E}" dt="2026-07-01T04:13:40.172" v="9774" actId="113"/>
+          <ac:chgData name="Toby Donaldson" userId="2e6e5431-bb17-4c41-9985-d39c50d83c73" providerId="ADAL" clId="{F31BC264-820E-54C4-A6D1-F92AF9CC222E}" dt="2026-07-02T17:22:42.224" v="11999" actId="20577"/>
           <ac:spMkLst>
             <pc:docMk/>
             <pc:sldMk cId="1685373950" sldId="272"/>
@@ -1003,7 +1043,7 @@
         </pc:spChg>
       </pc:sldChg>
       <pc:sldChg chg="modSp new mod">
-        <pc:chgData name="Toby Donaldson" userId="2e6e5431-bb17-4c41-9985-d39c50d83c73" providerId="ADAL" clId="{F31BC264-820E-54C4-A6D1-F92AF9CC222E}" dt="2026-07-01T06:07:17.047" v="11767" actId="20577"/>
+        <pc:chgData name="Toby Donaldson" userId="2e6e5431-bb17-4c41-9985-d39c50d83c73" providerId="ADAL" clId="{F31BC264-820E-54C4-A6D1-F92AF9CC222E}" dt="2026-07-02T18:49:58.272" v="12000" actId="20577"/>
         <pc:sldMkLst>
           <pc:docMk/>
           <pc:sldMk cId="401732496" sldId="275"/>
@@ -1017,7 +1057,7 @@
           </ac:spMkLst>
         </pc:spChg>
         <pc:spChg chg="mod">
-          <ac:chgData name="Toby Donaldson" userId="2e6e5431-bb17-4c41-9985-d39c50d83c73" providerId="ADAL" clId="{F31BC264-820E-54C4-A6D1-F92AF9CC222E}" dt="2026-07-01T06:07:17.047" v="11767" actId="20577"/>
+          <ac:chgData name="Toby Donaldson" userId="2e6e5431-bb17-4c41-9985-d39c50d83c73" providerId="ADAL" clId="{F31BC264-820E-54C4-A6D1-F92AF9CC222E}" dt="2026-07-02T18:49:58.272" v="12000" actId="20577"/>
           <ac:spMkLst>
             <pc:docMk/>
             <pc:sldMk cId="401732496" sldId="275"/>
@@ -4467,8 +4507,8 @@
           </a:p>
         </p:txBody>
       </p:sp>
-      <mc:AlternateContent xmlns:mc="http://schemas.openxmlformats.org/markup-compatibility/2006" xmlns:a14="http://schemas.microsoft.com/office/drawing/2010/main">
-        <mc:Choice Requires="a14">
+      <mc:AlternateContent xmlns:mc="http://schemas.openxmlformats.org/markup-compatibility/2006">
+        <mc:Choice xmlns:a14="http://schemas.microsoft.com/office/drawing/2010/main" Requires="a14">
           <p:sp>
             <p:nvSpPr>
               <p:cNvPr id="3" name="Content Placeholder 2">
@@ -4492,7 +4532,15 @@
               <a:p>
                 <a:r>
                   <a:rPr lang="en-US" dirty="0"/>
-                  <a:t>The input arrays A and B must be sorted for merge to work</a:t>
+                  <a:t>The input arrays A and B must be </a:t>
+                </a:r>
+                <a:r>
+                  <a:rPr lang="en-US" b="1" dirty="0"/>
+                  <a:t>sorted</a:t>
+                </a:r>
+                <a:r>
+                  <a:rPr lang="en-US" dirty="0"/>
+                  <a:t> for merge to work</a:t>
                 </a:r>
               </a:p>
               <a:p>
@@ -4574,7 +4622,7 @@
                 </a:r>
                 <a:r>
                   <a:rPr lang="en-US" dirty="0"/>
-                  <a:t> because there the loop runs </a:t>
+                  <a:t> because the loop runs </a:t>
                 </a:r>
                 <a14:m>
                   <m:oMath xmlns:m="http://schemas.openxmlformats.org/officeDocument/2006/math">
@@ -4626,11 +4674,11 @@
               <a:p>
                 <a:r>
                   <a:rPr lang="en-US" b="1" dirty="0"/>
-                  <a:t>Merging can be implemented more efficiently than we have done</a:t>
+                  <a:t>Merging can be implemented more efficiently than shown</a:t>
                 </a:r>
                 <a:r>
                   <a:rPr lang="en-US" dirty="0"/>
-                  <a:t>, e.g. once one array is exhausted just copy the rest of the other array with no comparisons needed</a:t>
+                  <a:t>, e.g. when an array is exhausted just copy the rest of the other array with no comparisons needed</a:t>
                 </a:r>
               </a:p>
               <a:p>
@@ -4648,7 +4696,27 @@
                 </a:r>
                 <a:r>
                   <a:rPr lang="en-US" dirty="0"/>
-                  <a:t>) needs 2n space</a:t>
+                  <a:t>) needs </a:t>
+                </a:r>
+                <a14:m>
+                  <m:oMath xmlns:m="http://schemas.openxmlformats.org/officeDocument/2006/math">
+                    <m:r>
+                      <a:rPr lang="en-US" i="1" dirty="0" smtClean="0">
+                        <a:latin typeface="Cambria Math" panose="02040503050406030204" pitchFamily="18" charset="0"/>
+                      </a:rPr>
+                      <m:t>2</m:t>
+                    </m:r>
+                    <m:r>
+                      <a:rPr lang="en-US" i="1" dirty="0" smtClean="0">
+                        <a:latin typeface="Cambria Math" panose="02040503050406030204" pitchFamily="18" charset="0"/>
+                      </a:rPr>
+                      <m:t>𝑛</m:t>
+                    </m:r>
+                  </m:oMath>
+                </a14:m>
+                <a:r>
+                  <a:rPr lang="en-US" dirty="0"/>
+                  <a:t> space</a:t>
                 </a:r>
               </a:p>
               <a:p>
@@ -4657,7 +4725,7 @@
             </p:txBody>
           </p:sp>
         </mc:Choice>
-        <mc:Fallback xmlns="">
+        <mc:Fallback>
           <p:sp>
             <p:nvSpPr>
               <p:cNvPr id="3" name="Content Placeholder 2">
@@ -4678,7 +4746,7 @@
               <a:blipFill>
                 <a:blip r:embed="rId2"/>
                 <a:stretch>
-                  <a:fillRect l="-1086" t="-2326" b="-3198"/>
+                  <a:fillRect l="-1086" t="-2326" r="-1448" b="-3198"/>
                 </a:stretch>
               </a:blipFill>
             </p:spPr>
@@ -5429,8 +5497,8 @@
           </a:p>
         </p:txBody>
       </p:sp>
-      <mc:AlternateContent xmlns:mc="http://schemas.openxmlformats.org/markup-compatibility/2006" xmlns:a14="http://schemas.microsoft.com/office/drawing/2010/main">
-        <mc:Choice Requires="a14">
+      <mc:AlternateContent xmlns:mc="http://schemas.openxmlformats.org/markup-compatibility/2006">
+        <mc:Choice xmlns:a14="http://schemas.microsoft.com/office/drawing/2010/main" Requires="a14">
           <p:sp>
             <p:nvSpPr>
               <p:cNvPr id="3" name="Content Placeholder 2">
@@ -5523,14 +5591,26 @@
               <a:p>
                 <a:r>
                   <a:rPr lang="en-US" dirty="0"/>
-                  <a:t>Quicksort splitting is called partitioning</a:t>
+                  <a:t>Quicksort splitting is called </a:t>
+                </a:r>
+                <a:r>
+                  <a:rPr lang="en-US" b="1" dirty="0"/>
+                  <a:t>partitioning</a:t>
                 </a:r>
               </a:p>
               <a:p>
                 <a:pPr lvl="1"/>
                 <a:r>
                   <a:rPr lang="en-US" dirty="0"/>
-                  <a:t>Partitioning re-arranges elements so all elements smaller than a chosen pivot value are on the left side, and all elements &gt;= pivot are on the other side</a:t>
+                  <a:t>Partitioning re-arranges elements so all elements smaller than a chosen </a:t>
+                </a:r>
+                <a:r>
+                  <a:rPr lang="en-US" b="1" dirty="0"/>
+                  <a:t>pivot value </a:t>
+                </a:r>
+                <a:r>
+                  <a:rPr lang="en-US" dirty="0"/>
+                  <a:t>are on the left side, and all elements &gt;= pivot are on the other side</a:t>
                 </a:r>
               </a:p>
               <a:p>
@@ -5552,7 +5632,7 @@
             </p:txBody>
           </p:sp>
         </mc:Choice>
-        <mc:Fallback xmlns="">
+        <mc:Fallback>
           <p:sp>
             <p:nvSpPr>
               <p:cNvPr id="3" name="Content Placeholder 2">
@@ -5573,7 +5653,7 @@
               <a:blipFill>
                 <a:blip r:embed="rId2"/>
                 <a:stretch>
-                  <a:fillRect l="-1086" t="-2326"/>
+                  <a:fillRect l="-1086" t="-2326" r="-362"/>
                 </a:stretch>
               </a:blipFill>
             </p:spPr>
@@ -5761,15 +5841,7 @@
             </a:pPr>
             <a:r>
               <a:rPr lang="en-CA" dirty="0"/>
-              <a:t>function </a:t>
-            </a:r>
-            <a:r>
-              <a:rPr lang="en-CA" dirty="0" err="1"/>
-              <a:t>quickSort</a:t>
-            </a:r>
-            <a:r>
-              <a:rPr lang="en-CA" dirty="0"/>
-              <a:t>(A, low, high):</a:t>
+              <a:t>function quicksort(A, lo, hi):</a:t>
             </a:r>
           </a:p>
           <a:p>
@@ -5778,7 +5850,7 @@
             </a:pPr>
             <a:r>
               <a:rPr lang="en-CA" dirty="0"/>
-              <a:t>   if low &gt;= high:  // base case: 0 or 1 element, already sorted</a:t>
+              <a:t>   if lo &gt;= hi:  // base case: 0 or 1 element, already sorted</a:t>
             </a:r>
           </a:p>
           <a:p>
@@ -5802,7 +5874,7 @@
             </a:pPr>
             <a:r>
               <a:rPr lang="en-CA" dirty="0"/>
-              <a:t>   p = partition(A, low, high) // partition and get pivot's final index</a:t>
+              <a:t>   p = partition(A, lo, hi)    // partition and get pivot's final index</a:t>
             </a:r>
           </a:p>
           <a:p>
@@ -5817,15 +5889,7 @@
             </a:pPr>
             <a:r>
               <a:rPr lang="en-CA" dirty="0"/>
-              <a:t>   </a:t>
-            </a:r>
-            <a:r>
-              <a:rPr lang="en-CA" dirty="0" err="1"/>
-              <a:t>quickSort</a:t>
-            </a:r>
-            <a:r>
-              <a:rPr lang="en-CA" dirty="0"/>
-              <a:t>(A, low, p - 1)    // sort left of pivot</a:t>
+              <a:t>   quicksort(A, lo, p - 1)    // sort left of pivot</a:t>
             </a:r>
           </a:p>
           <a:p>
@@ -5834,15 +5898,7 @@
             </a:pPr>
             <a:r>
               <a:rPr lang="en-CA" dirty="0"/>
-              <a:t>   </a:t>
-            </a:r>
-            <a:r>
-              <a:rPr lang="en-CA" dirty="0" err="1"/>
-              <a:t>quickSort</a:t>
-            </a:r>
-            <a:r>
-              <a:rPr lang="en-CA" dirty="0"/>
-              <a:t>(A, p + 1, high) // sort right of pivot</a:t>
+              <a:t>   quicksort(A, p + 1, h)    // sort right of pivot</a:t>
             </a:r>
           </a:p>
           <a:p>
@@ -5850,6 +5906,227 @@
               <a:buNone/>
             </a:pPr>
             <a:endParaRPr lang="en-US" dirty="0"/>
+          </a:p>
+        </p:txBody>
+      </p:sp>
+      <p:sp>
+        <p:nvSpPr>
+          <p:cNvPr id="4" name="Rectangle 3">
+            <a:extLst>
+              <a:ext uri="{FF2B5EF4-FFF2-40B4-BE49-F238E27FC236}">
+                <a16:creationId xmlns:a16="http://schemas.microsoft.com/office/drawing/2014/main" id="{20066896-B762-94D3-2C9F-A37E7A2E4C0F}"/>
+              </a:ext>
+            </a:extLst>
+          </p:cNvPr>
+          <p:cNvSpPr/>
+          <p:nvPr/>
+        </p:nvSpPr>
+        <p:spPr>
+          <a:xfrm>
+            <a:off x="6541476" y="908966"/>
+            <a:ext cx="3254829" cy="673240"/>
+          </a:xfrm>
+          <a:prstGeom prst="rect">
+            <a:avLst/>
+          </a:prstGeom>
+          <a:noFill/>
+        </p:spPr>
+        <p:style>
+          <a:lnRef idx="2">
+            <a:schemeClr val="accent1">
+              <a:shade val="15000"/>
+            </a:schemeClr>
+          </a:lnRef>
+          <a:fillRef idx="1">
+            <a:schemeClr val="accent1"/>
+          </a:fillRef>
+          <a:effectRef idx="0">
+            <a:schemeClr val="accent1"/>
+          </a:effectRef>
+          <a:fontRef idx="minor">
+            <a:schemeClr val="lt1"/>
+          </a:fontRef>
+        </p:style>
+        <p:txBody>
+          <a:bodyPr rtlCol="0" anchor="ctr"/>
+          <a:lstStyle/>
+          <a:p>
+            <a:pPr algn="ctr"/>
+            <a:endParaRPr lang="en-US" dirty="0"/>
+          </a:p>
+        </p:txBody>
+      </p:sp>
+      <p:sp>
+        <p:nvSpPr>
+          <p:cNvPr id="5" name="Rectangle 4">
+            <a:extLst>
+              <a:ext uri="{FF2B5EF4-FFF2-40B4-BE49-F238E27FC236}">
+                <a16:creationId xmlns:a16="http://schemas.microsoft.com/office/drawing/2014/main" id="{4C96CBCE-517F-8F94-6E2F-BE58FD93C3B3}"/>
+              </a:ext>
+            </a:extLst>
+          </p:cNvPr>
+          <p:cNvSpPr/>
+          <p:nvPr/>
+        </p:nvSpPr>
+        <p:spPr>
+          <a:xfrm>
+            <a:off x="7326922" y="908966"/>
+            <a:ext cx="319873" cy="673240"/>
+          </a:xfrm>
+          <a:prstGeom prst="rect">
+            <a:avLst/>
+          </a:prstGeom>
+          <a:noFill/>
+          <a:ln>
+            <a:solidFill>
+              <a:srgbClr val="FF0000"/>
+            </a:solidFill>
+          </a:ln>
+        </p:spPr>
+        <p:style>
+          <a:lnRef idx="2">
+            <a:schemeClr val="accent1">
+              <a:shade val="15000"/>
+            </a:schemeClr>
+          </a:lnRef>
+          <a:fillRef idx="1">
+            <a:schemeClr val="accent1"/>
+          </a:fillRef>
+          <a:effectRef idx="0">
+            <a:schemeClr val="accent1"/>
+          </a:effectRef>
+          <a:fontRef idx="minor">
+            <a:schemeClr val="lt1"/>
+          </a:fontRef>
+        </p:style>
+        <p:txBody>
+          <a:bodyPr rtlCol="0" anchor="ctr"/>
+          <a:lstStyle/>
+          <a:p>
+            <a:pPr algn="ctr"/>
+            <a:endParaRPr lang="en-US" dirty="0"/>
+          </a:p>
+        </p:txBody>
+      </p:sp>
+      <p:sp>
+        <p:nvSpPr>
+          <p:cNvPr id="6" name="Rectangle 5">
+            <a:extLst>
+              <a:ext uri="{FF2B5EF4-FFF2-40B4-BE49-F238E27FC236}">
+                <a16:creationId xmlns:a16="http://schemas.microsoft.com/office/drawing/2014/main" id="{AB5F44AE-DA8E-CB91-605C-8EFEC4986426}"/>
+              </a:ext>
+            </a:extLst>
+          </p:cNvPr>
+          <p:cNvSpPr/>
+          <p:nvPr/>
+        </p:nvSpPr>
+        <p:spPr>
+          <a:xfrm>
+            <a:off x="8705220" y="908966"/>
+            <a:ext cx="319873" cy="673240"/>
+          </a:xfrm>
+          <a:prstGeom prst="rect">
+            <a:avLst/>
+          </a:prstGeom>
+          <a:noFill/>
+          <a:ln>
+            <a:solidFill>
+              <a:srgbClr val="FF0000"/>
+            </a:solidFill>
+          </a:ln>
+        </p:spPr>
+        <p:style>
+          <a:lnRef idx="2">
+            <a:schemeClr val="accent1">
+              <a:shade val="15000"/>
+            </a:schemeClr>
+          </a:lnRef>
+          <a:fillRef idx="1">
+            <a:schemeClr val="accent1"/>
+          </a:fillRef>
+          <a:effectRef idx="0">
+            <a:schemeClr val="accent1"/>
+          </a:effectRef>
+          <a:fontRef idx="minor">
+            <a:schemeClr val="lt1"/>
+          </a:fontRef>
+        </p:style>
+        <p:txBody>
+          <a:bodyPr rtlCol="0" anchor="ctr"/>
+          <a:lstStyle/>
+          <a:p>
+            <a:pPr algn="ctr"/>
+            <a:endParaRPr lang="en-US" dirty="0"/>
+          </a:p>
+        </p:txBody>
+      </p:sp>
+      <p:sp>
+        <p:nvSpPr>
+          <p:cNvPr id="7" name="TextBox 6">
+            <a:extLst>
+              <a:ext uri="{FF2B5EF4-FFF2-40B4-BE49-F238E27FC236}">
+                <a16:creationId xmlns:a16="http://schemas.microsoft.com/office/drawing/2014/main" id="{05104D77-40E6-F6EA-FC58-6606F909BCBD}"/>
+              </a:ext>
+            </a:extLst>
+          </p:cNvPr>
+          <p:cNvSpPr txBox="1"/>
+          <p:nvPr/>
+        </p:nvSpPr>
+        <p:spPr>
+          <a:xfrm>
+            <a:off x="7276181" y="519848"/>
+            <a:ext cx="370614" cy="369332"/>
+          </a:xfrm>
+          <a:prstGeom prst="rect">
+            <a:avLst/>
+          </a:prstGeom>
+          <a:noFill/>
+        </p:spPr>
+        <p:txBody>
+          <a:bodyPr wrap="none" rtlCol="0">
+            <a:spAutoFit/>
+          </a:bodyPr>
+          <a:lstStyle/>
+          <a:p>
+            <a:r>
+              <a:rPr lang="en-US" dirty="0"/>
+              <a:t>lo</a:t>
+            </a:r>
+          </a:p>
+        </p:txBody>
+      </p:sp>
+      <p:sp>
+        <p:nvSpPr>
+          <p:cNvPr id="8" name="TextBox 7">
+            <a:extLst>
+              <a:ext uri="{FF2B5EF4-FFF2-40B4-BE49-F238E27FC236}">
+                <a16:creationId xmlns:a16="http://schemas.microsoft.com/office/drawing/2014/main" id="{3806EE62-44D5-530D-3D00-EEBC02B6F8FF}"/>
+              </a:ext>
+            </a:extLst>
+          </p:cNvPr>
+          <p:cNvSpPr txBox="1"/>
+          <p:nvPr/>
+        </p:nvSpPr>
+        <p:spPr>
+          <a:xfrm>
+            <a:off x="8659287" y="539634"/>
+            <a:ext cx="365806" cy="369332"/>
+          </a:xfrm>
+          <a:prstGeom prst="rect">
+            <a:avLst/>
+          </a:prstGeom>
+          <a:noFill/>
+        </p:spPr>
+        <p:txBody>
+          <a:bodyPr wrap="none" rtlCol="0">
+            <a:spAutoFit/>
+          </a:bodyPr>
+          <a:lstStyle/>
+          <a:p>
+            <a:r>
+              <a:rPr lang="en-US" dirty="0"/>
+              <a:t>hi</a:t>
+            </a:r>
           </a:p>
         </p:txBody>
       </p:sp>
@@ -5939,7 +6216,7 @@
             </a:pPr>
             <a:r>
               <a:rPr lang="en-CA" dirty="0"/>
-              <a:t>function partition(A, low, high):</a:t>
+              <a:t>function partition(A, lo, hi):</a:t>
             </a:r>
           </a:p>
           <a:p>
@@ -5948,7 +6225,7 @@
             </a:pPr>
             <a:r>
               <a:rPr lang="en-CA" dirty="0"/>
-              <a:t>   pivot = A[high]  // choose last element as pivot</a:t>
+              <a:t>   pivot = A[hi]  // choose last element as pivot</a:t>
             </a:r>
           </a:p>
           <a:p>
@@ -5965,7 +6242,7 @@
             </a:r>
             <a:r>
               <a:rPr lang="en-CA" dirty="0"/>
-              <a:t> = low - 1            // boundary of "elements &lt;= pivot"</a:t>
+              <a:t> = low - 1      // boundary of "elements &lt;= pivot"</a:t>
             </a:r>
           </a:p>
           <a:p>
@@ -5983,7 +6260,7 @@
             </a:pPr>
             <a:r>
               <a:rPr lang="en-CA" dirty="0"/>
-              <a:t>    for j = low to high - 1:</a:t>
+              <a:t>    for j = lo to hi - 1:</a:t>
             </a:r>
           </a:p>
           <a:p>
@@ -6060,7 +6337,7 @@
             </a:r>
             <a:r>
               <a:rPr lang="en-CA" dirty="0"/>
-              <a:t> + 1], A[high]) // move pivot into its final position</a:t>
+              <a:t> + 1], A[hi])  // move pivot into its final position</a:t>
             </a:r>
           </a:p>
           <a:p>
@@ -6077,7 +6354,7 @@
             </a:r>
             <a:r>
               <a:rPr lang="en-CA" dirty="0"/>
-              <a:t> + 1                        // pivot's final index</a:t>
+              <a:t> + 1                   // pivot's final index</a:t>
             </a:r>
           </a:p>
           <a:p>
@@ -6124,7 +6401,7 @@
             <a:pPr algn="ctr"/>
             <a:r>
               <a:rPr lang="en-CA" dirty="0"/>
-              <a:t>Choosing the pivot this way is the default standard strategy, but there are other ways to do it!</a:t>
+              <a:t>Choosing the pivot this way is the default strategy, but there are other ways to do it!</a:t>
             </a:r>
             <a:endParaRPr lang="en-US" dirty="0"/>
           </a:p>
@@ -6172,8 +6449,8 @@
           </a:fontRef>
         </p:style>
       </p:cxnSp>
-      <mc:AlternateContent xmlns:mc="http://schemas.openxmlformats.org/markup-compatibility/2006" xmlns:a14="http://schemas.microsoft.com/office/drawing/2010/main">
-        <mc:Choice Requires="a14">
+      <mc:AlternateContent xmlns:mc="http://schemas.openxmlformats.org/markup-compatibility/2006">
+        <mc:Choice xmlns:a14="http://schemas.microsoft.com/office/drawing/2010/main" Requires="a14">
           <p:sp>
             <p:nvSpPr>
               <p:cNvPr id="9" name="TextBox 8">
@@ -6256,7 +6533,7 @@
                 </a14:m>
                 <a:r>
                   <a:rPr lang="en-CA" dirty="0"/>
-                  <a:t> because there is one loop through the elements that does </a:t>
+                  <a:t> because there it loops through the elements and does </a:t>
                 </a:r>
                 <a14:m>
                   <m:oMath xmlns:m="http://schemas.openxmlformats.org/officeDocument/2006/math">
@@ -6283,7 +6560,7 @@
             </p:txBody>
           </p:sp>
         </mc:Choice>
-        <mc:Fallback xmlns="">
+        <mc:Fallback>
           <p:sp>
             <p:nvSpPr>
               <p:cNvPr id="9" name="TextBox 8">
@@ -6386,8 +6663,8 @@
           </a:p>
         </p:txBody>
       </p:sp>
-      <mc:AlternateContent xmlns:mc="http://schemas.openxmlformats.org/markup-compatibility/2006" xmlns:a14="http://schemas.microsoft.com/office/drawing/2010/main">
-        <mc:Choice Requires="a14">
+      <mc:AlternateContent xmlns:mc="http://schemas.openxmlformats.org/markup-compatibility/2006">
+        <mc:Choice xmlns:a14="http://schemas.microsoft.com/office/drawing/2010/main" Requires="a14">
           <p:sp>
             <p:nvSpPr>
               <p:cNvPr id="3" name="Content Placeholder 2">
@@ -6411,9 +6688,20 @@
               </a:bodyPr>
               <a:lstStyle/>
               <a:p>
+                <a:pPr marL="0" indent="0">
+                  <a:buNone/>
+                </a:pPr>
                 <a:r>
                   <a:rPr lang="en-US" dirty="0"/>
-                  <a:t>Assuming the partitions are balanced, i.e. each partition is about the same size, the resulting sorting tree has height about </a:t>
+                  <a:t>Assuming the partitions are </a:t>
+                </a:r>
+                <a:r>
+                  <a:rPr lang="en-US" b="1" dirty="0"/>
+                  <a:t>balanced</a:t>
+                </a:r>
+                <a:r>
+                  <a:rPr lang="en-US" dirty="0"/>
+                  <a:t>, i.e. each partition is about the same size, the resulting sorting tree has height about </a:t>
                 </a:r>
                 <a14:m>
                   <m:oMath xmlns:m="http://schemas.openxmlformats.org/officeDocument/2006/math">
@@ -6560,12 +6848,18 @@
                 </a:r>
               </a:p>
               <a:p>
+                <a:pPr marL="0" indent="0">
+                  <a:buNone/>
+                </a:pPr>
                 <a:r>
                   <a:rPr lang="en-US" dirty="0"/>
                   <a:t>BUT!</a:t>
                 </a:r>
               </a:p>
               <a:p>
+                <a:pPr marL="0" indent="0">
+                  <a:buNone/>
+                </a:pPr>
                 <a:r>
                   <a:rPr lang="en-US" dirty="0"/>
                   <a:t>If you get unbalanced partitions, the height of the tree can be </a:t>
@@ -6687,30 +6981,35 @@
                 </a:r>
               </a:p>
               <a:p>
-                <a:pPr lvl="1"/>
                 <a:r>
                   <a:rPr lang="en-US" dirty="0"/>
                   <a:t>Unbalance partitions occur if the data is already sorted</a:t>
                 </a:r>
               </a:p>
               <a:p>
-                <a:pPr lvl="1"/>
                 <a:r>
                   <a:rPr lang="en-US" dirty="0"/>
                   <a:t>Or in reverse sorted order</a:t>
                 </a:r>
               </a:p>
               <a:p>
-                <a:pPr lvl="1"/>
                 <a:r>
                   <a:rPr lang="en-US" dirty="0"/>
-                  <a:t>Thus: partially sorted data makes quicksort go slower!</a:t>
+                  <a:t>Thus: partially sorted data makes quicksort go </a:t>
+                </a:r>
+                <a:r>
+                  <a:rPr lang="en-US" b="1" dirty="0"/>
+                  <a:t>slower</a:t>
+                </a:r>
+                <a:r>
+                  <a:rPr lang="en-US" dirty="0"/>
+                  <a:t>!</a:t>
                 </a:r>
               </a:p>
             </p:txBody>
           </p:sp>
         </mc:Choice>
-        <mc:Fallback xmlns="">
+        <mc:Fallback>
           <p:sp>
             <p:nvSpPr>
               <p:cNvPr id="3" name="Content Placeholder 2">
@@ -6731,7 +7030,7 @@
               <a:blipFill>
                 <a:blip r:embed="rId2"/>
                 <a:stretch>
-                  <a:fillRect l="-1086" t="-3198" r="-1448"/>
+                  <a:fillRect l="-1206" t="-3198" r="-241"/>
                 </a:stretch>
               </a:blipFill>
             </p:spPr>
@@ -6808,8 +7107,8 @@
           </a:p>
         </p:txBody>
       </p:sp>
-      <mc:AlternateContent xmlns:mc="http://schemas.openxmlformats.org/markup-compatibility/2006" xmlns:a14="http://schemas.microsoft.com/office/drawing/2010/main">
-        <mc:Choice Requires="a14">
+      <mc:AlternateContent xmlns:mc="http://schemas.openxmlformats.org/markup-compatibility/2006">
+        <mc:Choice xmlns:a14="http://schemas.microsoft.com/office/drawing/2010/main" Requires="a14">
           <p:sp>
             <p:nvSpPr>
               <p:cNvPr id="3" name="Content Placeholder 2">
@@ -6829,7 +7128,7 @@
             <p:spPr/>
             <p:txBody>
               <a:bodyPr>
-                <a:normAutofit fontScale="85000" lnSpcReduction="20000"/>
+                <a:normAutofit fontScale="92500" lnSpcReduction="20000"/>
               </a:bodyPr>
               <a:lstStyle/>
               <a:p>
@@ -6949,7 +7248,7 @@
               <a:p>
                 <a:r>
                   <a:rPr lang="en-US" dirty="0"/>
-                  <a:t>So why do we care about quicksort if its worse case is as slow as insertion sort?</a:t>
+                  <a:t>So why do we care about quicksort if its worse case is so slow?</a:t>
                 </a:r>
               </a:p>
               <a:p>
@@ -7006,18 +7305,6 @@
                   <a:rPr lang="en-US" dirty="0"/>
                   <a:t> extra memory</a:t>
                 </a:r>
-              </a:p>
-              <a:p>
-                <a:pPr lvl="1"/>
-                <a:r>
-                  <a:rPr lang="en-US" dirty="0"/>
-                  <a:t>Quicksort can often be implemented more efficiently than </a:t>
-                </a:r>
-                <a:r>
-                  <a:rPr lang="en-US" dirty="0" err="1"/>
-                  <a:t>mergesort</a:t>
-                </a:r>
-                <a:endParaRPr lang="en-US" dirty="0"/>
               </a:p>
               <a:p>
                 <a:pPr lvl="1"/>
@@ -7150,7 +7437,7 @@
             </p:txBody>
           </p:sp>
         </mc:Choice>
-        <mc:Fallback xmlns="">
+        <mc:Fallback>
           <p:sp>
             <p:nvSpPr>
               <p:cNvPr id="3" name="Content Placeholder 2">
@@ -7171,7 +7458,7 @@
               <a:blipFill>
                 <a:blip r:embed="rId2"/>
                 <a:stretch>
-                  <a:fillRect l="-844" t="-3198"/>
+                  <a:fillRect l="-965" t="-3488"/>
                 </a:stretch>
               </a:blipFill>
             </p:spPr>
@@ -8005,13 +8292,8 @@
           <a:p>
             <a:r>
               <a:rPr lang="en-CA" dirty="0"/>
-              <a:t>Bucket sort </a:t>
-            </a:r>
-            <a:r>
-              <a:rPr lang="en-CA"/>
-              <a:t>and radix sort</a:t>
-            </a:r>
-            <a:endParaRPr lang="en-CA" dirty="0"/>
+              <a:t>Bucket sort and radix sort</a:t>
+            </a:r>
           </a:p>
           <a:p>
             <a:endParaRPr lang="en-CA" dirty="0"/>
@@ -8131,11 +8413,11 @@
             </a:r>
             <a:r>
               <a:rPr lang="en-US" dirty="0"/>
-              <a:t> are generally well-tested and efficient for many different types of </a:t>
+              <a:t> are generally well-tested and efficient for many different types </a:t>
             </a:r>
             <a:r>
               <a:rPr lang="en-US"/>
-              <a:t>dat</a:t>
+              <a:t>of data</a:t>
             </a:r>
           </a:p>
         </p:txBody>
@@ -8475,8 +8757,8 @@
           </a:p>
         </p:txBody>
       </p:sp>
-      <mc:AlternateContent xmlns:mc="http://schemas.openxmlformats.org/markup-compatibility/2006" xmlns:a14="http://schemas.microsoft.com/office/drawing/2010/main">
-        <mc:Choice Requires="a14">
+      <mc:AlternateContent xmlns:mc="http://schemas.openxmlformats.org/markup-compatibility/2006">
+        <mc:Choice xmlns:a14="http://schemas.microsoft.com/office/drawing/2010/main" Requires="a14">
           <p:sp>
             <p:nvSpPr>
               <p:cNvPr id="3" name="Content Placeholder 2">
@@ -8512,7 +8794,7 @@
                 </a:r>
                 <a:r>
                   <a:rPr lang="en-US" dirty="0"/>
-                  <a:t>is a well-know “simple” sorting algorithm. To sort an array </a:t>
+                  <a:t>is a well-know “simple” sorting algorithm. To sort array </a:t>
                 </a:r>
                 <a:r>
                   <a:rPr lang="en-US" dirty="0" err="1">
@@ -8671,7 +8953,7 @@
             </p:txBody>
           </p:sp>
         </mc:Choice>
-        <mc:Fallback xmlns="">
+        <mc:Fallback>
           <p:sp>
             <p:nvSpPr>
               <p:cNvPr id="3" name="Content Placeholder 2">
@@ -9106,8 +9388,8 @@
           </a:p>
         </p:txBody>
       </p:sp>
-      <mc:AlternateContent xmlns:mc="http://schemas.openxmlformats.org/markup-compatibility/2006" xmlns:a14="http://schemas.microsoft.com/office/drawing/2010/main">
-        <mc:Choice Requires="a14">
+      <mc:AlternateContent xmlns:mc="http://schemas.openxmlformats.org/markup-compatibility/2006">
+        <mc:Choice xmlns:a14="http://schemas.microsoft.com/office/drawing/2010/main" Requires="a14">
           <p:sp>
             <p:nvSpPr>
               <p:cNvPr id="12" name="TextBox 11">
@@ -9199,7 +9481,21 @@
                 </a:r>
                 <a:r>
                   <a:rPr lang="en-US" dirty="0"/>
-                  <a:t>because n elements must be inserted at an average of worst-case cost of </a:t>
+                  <a:t>because </a:t>
+                </a:r>
+                <a14:m>
+                  <m:oMath xmlns:m="http://schemas.openxmlformats.org/officeDocument/2006/math">
+                    <m:r>
+                      <a:rPr lang="en-US" i="1" dirty="0" smtClean="0">
+                        <a:latin typeface="Cambria Math" panose="02040503050406030204" pitchFamily="18" charset="0"/>
+                      </a:rPr>
+                      <m:t>𝑛</m:t>
+                    </m:r>
+                  </m:oMath>
+                </a14:m>
+                <a:r>
+                  <a:rPr lang="en-US" dirty="0"/>
+                  <a:t> elements must be inserted at an average of worst-case cost of </a:t>
                 </a:r>
                 <a14:m>
                   <m:oMath xmlns:m="http://schemas.openxmlformats.org/officeDocument/2006/math">
@@ -9237,7 +9533,7 @@
             </p:txBody>
           </p:sp>
         </mc:Choice>
-        <mc:Fallback xmlns="">
+        <mc:Fallback>
           <p:sp>
             <p:nvSpPr>
               <p:cNvPr id="12" name="TextBox 11">
@@ -9550,8 +9846,8 @@
           </a:p>
         </p:txBody>
       </p:sp>
-      <mc:AlternateContent xmlns:mc="http://schemas.openxmlformats.org/markup-compatibility/2006" xmlns:a14="http://schemas.microsoft.com/office/drawing/2010/main">
-        <mc:Choice Requires="a14">
+      <mc:AlternateContent xmlns:mc="http://schemas.openxmlformats.org/markup-compatibility/2006">
+        <mc:Choice xmlns:a14="http://schemas.microsoft.com/office/drawing/2010/main" Requires="a14">
           <p:sp>
             <p:nvSpPr>
               <p:cNvPr id="3" name="Content Placeholder 2">
@@ -9585,7 +9881,7 @@
                 </a:r>
                 <a:r>
                   <a:rPr lang="en-US" dirty="0"/>
-                  <a:t>with heaps you can </a:t>
+                  <a:t>with heaps you have </a:t>
                 </a:r>
                 <a14:m>
                   <m:oMath xmlns:m="http://schemas.openxmlformats.org/officeDocument/2006/math">
@@ -10088,7 +10384,7 @@
             </p:txBody>
           </p:sp>
         </mc:Choice>
-        <mc:Fallback xmlns="">
+        <mc:Fallback>
           <p:sp>
             <p:nvSpPr>
               <p:cNvPr id="3" name="Content Placeholder 2">
@@ -10109,7 +10405,7 @@
               <a:blipFill>
                 <a:blip r:embed="rId2"/>
                 <a:stretch>
-                  <a:fillRect l="-1086" t="-3198" r="-844"/>
+                  <a:fillRect l="-1086" t="-3198" r="-1206"/>
                 </a:stretch>
               </a:blipFill>
             </p:spPr>
@@ -10212,7 +10508,7 @@
             </a:pPr>
             <a:r>
               <a:rPr lang="en-US" b="1" dirty="0"/>
-              <a:t>Divide and conquer idea</a:t>
+              <a:t>Idea</a:t>
             </a:r>
             <a:r>
               <a:rPr lang="en-US" dirty="0"/>
@@ -10330,7 +10626,7 @@
         <p:spPr/>
         <p:txBody>
           <a:bodyPr>
-            <a:normAutofit lnSpcReduction="10000"/>
+            <a:normAutofit fontScale="92500" lnSpcReduction="20000"/>
           </a:bodyPr>
           <a:lstStyle/>
           <a:p>
@@ -10356,7 +10652,7 @@
             </a:pPr>
             <a:r>
               <a:rPr lang="en-CA" dirty="0"/>
-              <a:t>    if </a:t>
+              <a:t>    n = </a:t>
             </a:r>
             <a:r>
               <a:rPr lang="en-CA" dirty="0" err="1"/>
@@ -10364,7 +10660,16 @@
             </a:r>
             <a:r>
               <a:rPr lang="en-CA" dirty="0"/>
-              <a:t>() &lt;= 1:</a:t>
+              <a:t>()</a:t>
+            </a:r>
+          </a:p>
+          <a:p>
+            <a:pPr marL="0" indent="0">
+              <a:buNone/>
+            </a:pPr>
+            <a:r>
+              <a:rPr lang="en-CA" dirty="0"/>
+              <a:t>    if n &lt;= 1:</a:t>
             </a:r>
           </a:p>
           <a:p>
@@ -10388,15 +10693,7 @@
             </a:pPr>
             <a:r>
               <a:rPr lang="en-CA" dirty="0"/>
-              <a:t>    mid = </a:t>
-            </a:r>
-            <a:r>
-              <a:rPr lang="en-CA" dirty="0" err="1"/>
-              <a:t>A.size</a:t>
-            </a:r>
-            <a:r>
-              <a:rPr lang="en-CA" dirty="0"/>
-              <a:t>() / 2</a:t>
+              <a:t>    mid = n) / 2</a:t>
             </a:r>
           </a:p>
           <a:p>
@@ -10414,15 +10711,7 @@
             </a:pPr>
             <a:r>
               <a:rPr lang="en-CA" dirty="0"/>
-              <a:t>    right = A[mid .. </a:t>
-            </a:r>
-            <a:r>
-              <a:rPr lang="en-CA" dirty="0" err="1"/>
-              <a:t>A.size</a:t>
-            </a:r>
-            <a:r>
-              <a:rPr lang="en-CA" dirty="0"/>
-              <a:t>() -1]</a:t>
+              <a:t>    right = A[mid .. n-1]</a:t>
             </a:r>
           </a:p>
           <a:p>
@@ -10658,7 +10947,15 @@
             </a:br>
             <a:r>
               <a:rPr lang="en-CA" dirty="0"/>
-              <a:t>   for k = 0 to length(C) - 1:</a:t>
+              <a:t>   for k = 0 to </a:t>
+            </a:r>
+            <a:r>
+              <a:rPr lang="en-CA" dirty="0" err="1"/>
+              <a:t>C.size</a:t>
+            </a:r>
+            <a:r>
+              <a:rPr lang="en-CA" dirty="0"/>
+              <a:t>() - 1:</a:t>
             </a:r>
           </a:p>
           <a:p>

--- a/lectures/lecture20_21/sorting.pptx
+++ b/lectures/lecture20_21/sorting.pptx
@@ -134,7 +134,7 @@
 <file path=ppt/revisionInfo.xml><?xml version="1.0" encoding="utf-8"?>
 <p1510:revInfo xmlns:a="http://schemas.openxmlformats.org/drawingml/2006/main" xmlns:r="http://schemas.openxmlformats.org/officeDocument/2006/relationships" xmlns:p1510="http://schemas.microsoft.com/office/powerpoint/2015/10/main">
   <p1510:revLst>
-    <p1510:client id="{70D2DAD8-E89F-AC41-B3EB-40B243B3DD5F}" v="503" dt="2026-07-02T17:21:27.525"/>
+    <p1510:client id="{70D2DAD8-E89F-AC41-B3EB-40B243B3DD5F}" v="506" dt="2026-07-02T20:16:05.663"/>
   </p1510:revLst>
 </p1510:revInfo>
 </file>
@@ -144,7 +144,7 @@
   <pc:docChgLst>
     <pc:chgData name="Toby Donaldson" userId="2e6e5431-bb17-4c41-9985-d39c50d83c73" providerId="ADAL" clId="{F31BC264-820E-54C4-A6D1-F92AF9CC222E}"/>
     <pc:docChg chg="undo custSel addSld delSld modSld">
-      <pc:chgData name="Toby Donaldson" userId="2e6e5431-bb17-4c41-9985-d39c50d83c73" providerId="ADAL" clId="{F31BC264-820E-54C4-A6D1-F92AF9CC222E}" dt="2026-07-02T18:49:58.272" v="12000" actId="20577"/>
+      <pc:chgData name="Toby Donaldson" userId="2e6e5431-bb17-4c41-9985-d39c50d83c73" providerId="ADAL" clId="{F31BC264-820E-54C4-A6D1-F92AF9CC222E}" dt="2026-07-02T20:16:05.663" v="12008"/>
       <pc:docMkLst>
         <pc:docMk/>
       </pc:docMkLst>
@@ -432,7 +432,7 @@
         </pc:sldMkLst>
       </pc:sldChg>
       <pc:sldChg chg="addSp delSp modSp new mod">
-        <pc:chgData name="Toby Donaldson" userId="2e6e5431-bb17-4c41-9985-d39c50d83c73" providerId="ADAL" clId="{F31BC264-820E-54C4-A6D1-F92AF9CC222E}" dt="2026-07-02T17:12:26.992" v="11851" actId="20577"/>
+        <pc:chgData name="Toby Donaldson" userId="2e6e5431-bb17-4c41-9985-d39c50d83c73" providerId="ADAL" clId="{F31BC264-820E-54C4-A6D1-F92AF9CC222E}" dt="2026-07-02T19:38:48.784" v="12001" actId="20577"/>
         <pc:sldMkLst>
           <pc:docMk/>
           <pc:sldMk cId="2317800348" sldId="263"/>
@@ -446,7 +446,7 @@
           </ac:spMkLst>
         </pc:spChg>
         <pc:spChg chg="mod">
-          <ac:chgData name="Toby Donaldson" userId="2e6e5431-bb17-4c41-9985-d39c50d83c73" providerId="ADAL" clId="{F31BC264-820E-54C4-A6D1-F92AF9CC222E}" dt="2026-07-02T17:12:26.992" v="11851" actId="20577"/>
+          <ac:chgData name="Toby Donaldson" userId="2e6e5431-bb17-4c41-9985-d39c50d83c73" providerId="ADAL" clId="{F31BC264-820E-54C4-A6D1-F92AF9CC222E}" dt="2026-07-02T19:38:48.784" v="12001" actId="20577"/>
           <ac:spMkLst>
             <pc:docMk/>
             <pc:sldMk cId="2317800348" sldId="263"/>
@@ -478,7 +478,7 @@
         </pc:sldMkLst>
       </pc:sldChg>
       <pc:sldChg chg="addSp delSp modSp new mod">
-        <pc:chgData name="Toby Donaldson" userId="2e6e5431-bb17-4c41-9985-d39c50d83c73" providerId="ADAL" clId="{F31BC264-820E-54C4-A6D1-F92AF9CC222E}" dt="2026-07-02T17:13:32.844" v="11868" actId="20577"/>
+        <pc:chgData name="Toby Donaldson" userId="2e6e5431-bb17-4c41-9985-d39c50d83c73" providerId="ADAL" clId="{F31BC264-820E-54C4-A6D1-F92AF9CC222E}" dt="2026-07-02T19:55:40.531" v="12002"/>
         <pc:sldMkLst>
           <pc:docMk/>
           <pc:sldMk cId="1936074923" sldId="264"/>
@@ -659,6 +659,14 @@
             <ac:spMk id="23" creationId="{D09BB153-8C7A-F349-D095-B6865A509AB9}"/>
           </ac:spMkLst>
         </pc:spChg>
+        <pc:inkChg chg="add">
+          <ac:chgData name="Toby Donaldson" userId="2e6e5431-bb17-4c41-9985-d39c50d83c73" providerId="ADAL" clId="{F31BC264-820E-54C4-A6D1-F92AF9CC222E}" dt="2026-07-02T19:55:40.531" v="12002"/>
+          <ac:inkMkLst>
+            <pc:docMk/>
+            <pc:sldMk cId="1936074923" sldId="264"/>
+            <ac:inkMk id="6" creationId="{7941A223-86BC-3DB0-7A3E-7108999E783C}"/>
+          </ac:inkMkLst>
+        </pc:inkChg>
       </pc:sldChg>
       <pc:sldChg chg="del">
         <pc:chgData name="Toby Donaldson" userId="2e6e5431-bb17-4c41-9985-d39c50d83c73" providerId="ADAL" clId="{F31BC264-820E-54C4-A6D1-F92AF9CC222E}" dt="2026-07-01T02:38:43.500" v="623" actId="2696"/>
@@ -820,7 +828,7 @@
         </pc:sldMkLst>
       </pc:sldChg>
       <pc:sldChg chg="addSp modSp new mod">
-        <pc:chgData name="Toby Donaldson" userId="2e6e5431-bb17-4c41-9985-d39c50d83c73" providerId="ADAL" clId="{F31BC264-820E-54C4-A6D1-F92AF9CC222E}" dt="2026-07-02T17:19:18.203" v="11942" actId="20577"/>
+        <pc:chgData name="Toby Donaldson" userId="2e6e5431-bb17-4c41-9985-d39c50d83c73" providerId="ADAL" clId="{F31BC264-820E-54C4-A6D1-F92AF9CC222E}" dt="2026-07-02T20:14:03.995" v="12007" actId="20577"/>
         <pc:sldMkLst>
           <pc:docMk/>
           <pc:sldMk cId="3011741837" sldId="269"/>
@@ -834,7 +842,7 @@
           </ac:spMkLst>
         </pc:spChg>
         <pc:spChg chg="mod">
-          <ac:chgData name="Toby Donaldson" userId="2e6e5431-bb17-4c41-9985-d39c50d83c73" providerId="ADAL" clId="{F31BC264-820E-54C4-A6D1-F92AF9CC222E}" dt="2026-07-02T17:19:18.203" v="11942" actId="20577"/>
+          <ac:chgData name="Toby Donaldson" userId="2e6e5431-bb17-4c41-9985-d39c50d83c73" providerId="ADAL" clId="{F31BC264-820E-54C4-A6D1-F92AF9CC222E}" dt="2026-07-02T20:14:03.995" v="12007" actId="20577"/>
           <ac:spMkLst>
             <pc:docMk/>
             <pc:sldMk cId="3011741837" sldId="269"/>
@@ -881,6 +889,14 @@
             <ac:spMk id="8" creationId="{3806EE62-44D5-530D-3D00-EEBC02B6F8FF}"/>
           </ac:spMkLst>
         </pc:spChg>
+        <pc:inkChg chg="add">
+          <ac:chgData name="Toby Donaldson" userId="2e6e5431-bb17-4c41-9985-d39c50d83c73" providerId="ADAL" clId="{F31BC264-820E-54C4-A6D1-F92AF9CC222E}" dt="2026-07-02T20:13:56.979" v="12003"/>
+          <ac:inkMkLst>
+            <pc:docMk/>
+            <pc:sldMk cId="3011741837" sldId="269"/>
+            <ac:inkMk id="9" creationId="{F791F199-4178-0658-0B12-A2FDF00F21DA}"/>
+          </ac:inkMkLst>
+        </pc:inkChg>
       </pc:sldChg>
       <pc:sldChg chg="addSp modSp del">
         <pc:chgData name="Toby Donaldson" userId="2e6e5431-bb17-4c41-9985-d39c50d83c73" providerId="ADAL" clId="{F31BC264-820E-54C4-A6D1-F92AF9CC222E}" dt="2026-07-01T02:38:43.500" v="623" actId="2696"/>
@@ -890,7 +906,7 @@
         </pc:sldMkLst>
       </pc:sldChg>
       <pc:sldChg chg="addSp modSp new mod">
-        <pc:chgData name="Toby Donaldson" userId="2e6e5431-bb17-4c41-9985-d39c50d83c73" providerId="ADAL" clId="{F31BC264-820E-54C4-A6D1-F92AF9CC222E}" dt="2026-07-02T17:20:52.456" v="11980" actId="20577"/>
+        <pc:chgData name="Toby Donaldson" userId="2e6e5431-bb17-4c41-9985-d39c50d83c73" providerId="ADAL" clId="{F31BC264-820E-54C4-A6D1-F92AF9CC222E}" dt="2026-07-02T20:16:05.663" v="12008"/>
         <pc:sldMkLst>
           <pc:docMk/>
           <pc:sldMk cId="3791056666" sldId="270"/>
@@ -927,6 +943,14 @@
             <ac:spMk id="9" creationId="{A1429E76-AFC6-1A60-DEF3-FD8D5953FA55}"/>
           </ac:spMkLst>
         </pc:spChg>
+        <pc:inkChg chg="add">
+          <ac:chgData name="Toby Donaldson" userId="2e6e5431-bb17-4c41-9985-d39c50d83c73" providerId="ADAL" clId="{F31BC264-820E-54C4-A6D1-F92AF9CC222E}" dt="2026-07-02T20:16:05.663" v="12008"/>
+          <ac:inkMkLst>
+            <pc:docMk/>
+            <pc:sldMk cId="3791056666" sldId="270"/>
+            <ac:inkMk id="5" creationId="{A9CF8751-CC47-1321-C74E-71EA38474989}"/>
+          </ac:inkMkLst>
+        </pc:inkChg>
         <pc:cxnChg chg="add mod">
           <ac:chgData name="Toby Donaldson" userId="2e6e5431-bb17-4c41-9985-d39c50d83c73" providerId="ADAL" clId="{F31BC264-820E-54C4-A6D1-F92AF9CC222E}" dt="2026-07-01T03:58:16.969" v="7877" actId="14100"/>
           <ac:cxnSpMkLst>
@@ -1173,6 +1197,106 @@
     </pc:docChg>
   </pc:docChgLst>
 </pc:chgInfo>
+</file>
+
+<file path=ppt/ink/ink1.xml><?xml version="1.0" encoding="utf-8"?>
+<inkml:ink xmlns:inkml="http://www.w3.org/2003/InkML">
+  <inkml:definitions>
+    <inkml:context xml:id="ctx0">
+      <inkml:inkSource xml:id="inkSrc0">
+        <inkml:traceFormat>
+          <inkml:channel name="X" type="integer" min="-2.14748E9" max="2.14748E9" units="cm"/>
+          <inkml:channel name="Y" type="integer" min="-2.14748E9" max="2.14748E9" units="cm"/>
+          <inkml:channel name="F" type="integer" max="32767" units="dev"/>
+        </inkml:traceFormat>
+        <inkml:channelProperties>
+          <inkml:channelProperty channel="X" name="resolution" value="1000" units="1/cm"/>
+          <inkml:channelProperty channel="Y" name="resolution" value="1000" units="1/cm"/>
+          <inkml:channelProperty channel="F" name="resolution" value="0" units="1/dev"/>
+        </inkml:channelProperties>
+      </inkml:inkSource>
+      <inkml:timestamp xml:id="ts0" timeString="2026-07-02T19:48:28.802"/>
+    </inkml:context>
+    <inkml:brush xml:id="br0">
+      <inkml:brushProperty name="width" value="0.05292" units="cm"/>
+      <inkml:brushProperty name="height" value="0.05292" units="cm"/>
+      <inkml:brushProperty name="color" value="#FF0000"/>
+    </inkml:brush>
+  </inkml:definitions>
+  <inkml:trace contextRef="#ctx0" brushRef="#br0">2558 4568 24575,'35'0'0,"-5"0"0,7 0 0,5 0 0,6 0 0,-1 0 0,-7 0 0,0 0 0,1 0-428,0 0 1,3 0 0,0 0-1,-4 0 428,-3 0 0,-3 0 0,1 0 66,3 0 0,0 0 0,-1 0-66,10 0 0,-2 0 183,-4 0 1,-3 0-184,-11 0 0,-3 0 0,11 0 0,0 0 430,-10 0 1,1 0-431,9 0 0,1 0 142,1 0 0,0 0-142,5 0 0,3 0 0,-7 0 0,2 0 0,-1 0 0,-4 1 0,0-1 0,1-1 0,9-3 0,3-2 0,-2 1-184,-7 3 1,-1 2 0,-1-2 183,-2-2 0,1-2 0,-1 0 0,0 1 0,0-1 0,0 2 0,5 2 0,1 2 0,0-2 0,1-8 0,-1-2 0,1 2 0,0 7 0,0 4 0,0-3 0,-1-3 0,0-1 0,-2 2 0,11 4 0,-2 0 0,-13-5 0,0-1 0,-1 1 0,16 3 0,-2 0 0,-4-6 0,2 0 0,-2 7 0,3 2 0,-4-1 0,-2 0 0,0 0 0,-3 0 0,3 0 0,-2 0 0,4 0 0,0 0 0,2 0 0,0 0 0,-4 0 0,0 0 0,10 0 0,-2 0 0,-15 0 0,-1 0 0,9 0 0,2 0 0,-1 0 0,0 0 0,-8 0 0,1 0 0,-1 0 0,12 0 0,0 0 0,-12 0 0,0 0 0,-3 0 0,-4 0 0,-1 0 0,7 0 0,-1 0 0,6 0 0,2 8 0,0 0 550,2-4-550,2 4 0,0 0 0,-3-8 0,-10 2 0,9 3 0,2 0 0,-7-2 0,1-1 0,1 0 0,6 5 0,8 2 0,1 0 0,-6-2 0,3-6 0,-2 2 0,-9 5 0,2 4 0,0-1 0,2-4 0,0-1 0,-3 0 0,1 4 0,-2 0 0,6 6 0,4-1 0,-1-8 0,4-2 0,-7 3 0,-9 9 0,3 1 0,-2-10 0,9-2 0,5-1 0,1-1 0,-4 2 0,-8 1 0,-4 4 0,-5 1 0,4 0 0,7-4 0,8-2 0,2 0 0,-2 1 0,-9 1 0,-6 4 0,-5 1 0,1-3 0,7-2 0,1-2 0,-2 0 0,8 2 0,-4 0 0,-13-1 0,-1 1 0,15 2 0,-2 0 0,4 10 0,-11-12 0,0-1 0,2 9 0,1-12 0,-12 11 0,3 1 0,0-14 0,1 0 0,-1 14 0,0-1 0,7-12 0,-1-2 0,-6 7 0,1 0 0,18-7 0,2-2 0,-9 1 0,-2 0 0,2 0 0,1 0 0,10 0 0,-2 0 0,-1 0 0,2 0 0,0 0 0,-10 0 0,-8 0 0,5 0 0,6 0 0,5 0 0,-3 0 0,0 0 0,2 0 0,-2 0 0,6 0 0,0 0 0,-6 0 0,6 0 0,-4 0 0,-8 0 0,0 0 0,0 0 0,-3 0 0,-1 0 0,-1 0 0,11 0 0,2 0 0,-10 0 0,3 0 0,1 0 0,-2 0 0,7 0 0,-2 0 0,2 0-321,-5 0 1,2 0-1,0 0 1,-1 0 320,7 1 0,-1 0 0,-3-3 0,-9-3 0,-2-1 0,1 1 0,1 4 0,0 1 0,-3-3 0,-3-5 0,-3 1 0,9 7 0,-4 0 0,-11 0 0,15 0 1282,0-16-1282,-4 13 0,5 2 0,-3-4 0,2-1 0,3 2 0,8 2 0,3 3 0,1 0 0,-12-1 0,0 0 0,0 0 0,1 0 0,4 0 0,1 0 0,-1 0 0,-3 0 0,-3 0 0,-3 0 0,1 0 0,15 0 0,2 0 0,-5 0 0,-6 0 0,-3 0 0,5 0 0,0 0 0,-9 1 0,-2-2 0,-5-7 0,1 0 0,5 6 0,3 2 0,-3-2 0,-2-6 0,1 0 0,2 7 0,3 3 0,-2-3 0,1-6 0,0-1 0,11 6 0,4 0 0,-12-5 0,4-2 0,1 0 0,-1 2 0,-5 5 0,0 1 0,0 2 0,1-3 0,1-1 0,2-2 0,-1 1 0,-4 1 0,-1 2 0,-3 1 0,0 1 0,17 0 0,-2-2 0,-5-7 0,1 0 0,-9 7 0,1 1 0,0-3 0,2-6 0,0-4 0,-4 4 0,-4 6 0,-1 2 0,5-6 0,-1-2 0,2-7 0,0 13 0,0-13 0,1 16 0,-1 0 0,-10 0 0,1 0 0,13 0 0,-13 1 0,-1-2 0,10-15 0,1 12 0,-1-11 0,-16 15 0,13-16 0,-13 12 0,1-12 0,27 1 0,-31 11 0,22-5 0,4 2 0,-7 7 0,14 0 0,0 0 0,-6 0 0,-2-7 0,1-2 0,-15 8 0,1-2 0,4-6 0,3-3 0,0 2 0,4 8 0,0 0 0,5-14 0,-2 1 0,-6 13 0,-5 0 0,-8-14 0,24 16 0,-43 0 0,28 0 0,3-15 0,12 11 0,-13-5 0,1 2 0,-4 6 0,0 2 0,6-1 0,-3 0 0,5 0 0,8 0 0,-43 0 0,12 0 0</inkml:trace>
+  <inkml:trace contextRef="#ctx0" brushRef="#br0" timeOffset="12031">4233 7938 24575,'26'0'0,"8"0"0,6 0 0,7 0 0,0 0 0,1 0 0,-2 0 0,-3 0 0,-3 0 0,-14 0 0,-1 0 0,1 0 0,3 0 0,12 0 0,4 0 0,-11 0 0,1 0 0,2 0-414,4 0 0,1 1 0,0-2 414,1-4 0,1-1 0,2 1 0,-1 3 0,4 2 0,-1 0 0,-3-2 0,-1-3 0,-2-1 0,1 1 0,-5 4 0,1 1 0,0 1 0,-2-1-10,-1 0 0,-2 0 1,-2 0 9,5 0 0,0 0 0,6 0 0,0 0 0,0-1 0,1 2 0,-7 4 0,2 1 0,-2-1 0,12-4 0,-2 2 0,-10 6 0,1 4 0,-3-4 0,1-6 0,-1-2 0,0 7 0,0 0 0,0-8 0,1 0 0,7 7 0,0 1 0,-6-6 0,0 0 620,7 7 0,-1-2-620,-7-6 0,-2-2 15,-6 1 1,-1 0-16,7 0 0,-1 0 0,14 0 0,-21 0 0,1 0 0,2 0 0,1 0 0,-3 0 0,0 0 0,8 0 0,1 0 0,7 0 0,0 0 0,-6 0 0,1 0 0,-1 0 0,4 0 0,-2 0 0,9 0 0,-2 0 0,-11 0 0,1 0 0,-1 0 0,0 0 0,-1 0 0,-1 0 0,5 0 0,-1 0 0,2 0 0,0 0 0,-4 0 0,-1 0 0,-3 0 0,0 0 0,4 0 0,1 0 0,0 0 0,-2 0 0,-6 0 0,-1 0 0,7 0 0,-1 0 0,-6 0 0,1 0 0,6 0 0,2 0 0,-1 0 0,1 0 0,7 0 0,0 0 0,-6 0 0,1 0 0,-5 0 0,2 0 0,-2 0 0,9 0 0,-1 0 0,3 0 0,0 0 0,-5 0 0,0 0 0,5 0 0,-1 0 0,-6 0 0,0 0 0,6 0 0,0 0 0,-7 0 0,-1 0 0,0 0 0,0 0 0,1 0 0,-1 0 0,0 0 0,1 0 0,-1 0 0,0 0 0,0 0 0,1 0 0,0 0 0,-2 0 0,13 0 0,-13 0 0,-11 0 0,-19 0 0,27 0 0,-27 0 0,28 0 0,-13 0 0,17 0 0,-17 0 0,-3 0 0,-16 0 0,-16 0 0,12 0 0,-11 0 0</inkml:trace>
+  <inkml:trace contextRef="#ctx0" brushRef="#br0" timeOffset="14415">15893 16969 24575,'35'19'0,"4"-9"0,4-4 0,-6-5 0,5-2-820,-2 1 1,7 0 0,2 0 0,-1 0 561,-5 0 1,-1 0-1,1 0 1,5 0 257,-5 0 0,5 0 0,2 0 0,2 0 0,-1 0 0,-2 0 0,-3 0 0,3 0 0,-4 0 0,-1 0 0,2 0 0,2 0-351,-4 0 1,2 0-1,3 0 1,-1 0-1,0 0 1,-1 0-1,-4 0 351,2 0 0,-2 0 0,-2 0 0,1 0 0,1 0 0,4 0 0,0 1 0,2-1 0,-1 0 0,0-1-109,-2-1 1,1-2 0,-1 0-1,0 1 1,0 0 108,-2 2 0,1 0 0,-1 1 0,-1 0 0,0-2-325,7-1 0,-2-2 1,1 1-1,-2 1 325,0 2 0,0 2 0,-1-1 0,-1 0 0,-4-4 0,-2 0 0,1-1 0,0 2 0,3 2 0,1 1 0,-1 0 0,0-3 0,-5-3 0,0-3 0,-1 0 0,3 2 0,6 1 0,2 2 0,0 0 0,0-2 0,-1-2 0,0-1 0,0 0 0,0 0 0,2 0 0,0 0 0,0 0 0,0 1 0,-1-2 0,1 1 0,-1 0 0,-1 1 0,-2 2 0,-1 1 0,0 1 0,-1 0 0,-4-1 0,-1 1 0,0 0 0,0 1 179,1 2 1,0 1-1,0 1 1,-1-1-180,7 0 0,-1 0 0,0 0 0,3 0 0,1 0 0,-1 0 0,-5 0 0,0 0 0,-1 0 704,0 0 1,0 0 0,-2 0-705,-2 0 0,-2 0 0,-1 0 0,12 0 0,-2 0 1109,-4 0 1,-1 0-1110,4 0 0,-2 0 925,-15 0 1,-1 0-926,1 0 0,-1 0 1149,6 0-1149,-27 16 551,12-12-551,-16 11 0,0-15 0,0 16 0,0-12 0,0 12 0,0-1 0,0-11 0,-16 12 0,12-1 0,-27-11 0,27 28 0,-12-28 0,1 27 0,11-27 0,-12 27 0,16-42 0,0 22 0,0-58 0,0 8-656,0 4 1,0 0-1,0-5 1,0 9 0</inkml:trace>
+  <inkml:trace contextRef="#ctx0" brushRef="#br0" timeOffset="32385">4163 9049 24575,'35'0'0,"8"-16"0,-6 12 0,-16-11 0,2-1 0,11 6 0,-2 0 0,-4-9 0,3 9 0,0 4 0,-11 6 0,0 0 0,11 0 0,-27 0 0,27-16 0,-27 12 0,27-11 0,-11 15 0,15 0 0,1 0 0,-11-8 0,1 0 0,13 4 0,-9-5 0,6-4 0,-4 4 0,15 5 0,-16-6 0,5-2 0,-5 2 0,8 6 0,-10-11 0,1-1 0,7 12 0,6-11 0,-8 15 0,-9 0 0,-1 0 0,15 0 0,-8-8 0,2 0 0,-6 6 0,-1 0 0,7-6 0,3 0 0,-4 8 0,3 1 0,-3-2 0,-2-6 0,0-1 0,20 6 0,-4 0 0,-8-14 0,-5 16 0,-1 0 0,6-16 0,-13 14 0,-1 0 0,11-13 0,7 15 0,-6 0 0,6 0 0,-8 0 0,-9 0 0,-1 0 0,14 0 0,-6 0 0,1 0 0,-7 0 0,1 0 0,14 0 0,2 0 0,-6 0 0,-1 0 0,-2 0 0,0 0 0,0 0 0,-3 0 0,7 0 0,-13 0 0,-1 0 0,10 0 0,1 0 0,-1 0 0,0 0 0,0 0 0,1 0 0,-9 0 0,22 0 0,-11 0 0,2 0 0,-1 0 0,1 0 0,-6-1 0,1 0 0,-2 3 0,3 5 0,-2 1 0,2-6 0,-1 0 0,0 6 0,0 0 0,0-8 0,1 0 0,6 8 0,2 0 0,-9-7 0,1 0 0,-1 1 0,8 6 0,0-1 0,8-6 0,-2-2 0,-17 0 0,-1 2 0,5 7 0,-1 0 0,-8-6 0,0 0 0,7 6 0,-1 0 0,-5-8 0,-1 0 0,0 0 0,1 0 0,-2 0 0,-1 0 0,10 0 0,-15 0 0,11 0 0,-27 0 0,12 0 0,-1 0 0,21 0 0,3 0 0,-7-2 0,2 4 0,-6 5 0,-1 1 0,9-6 0,-1 0 0,-7 6 0,-1 0 0,8-8 0,-4 0 0,-19 0 0,21 0 0,-21 15 0,20-11 0,-29 12 0,29-16 0,-13 0 0,17 16 0,-10-15 0,-1 2 0,-2 12 0,24-15 0,-43 0 0,12 0 0,-16 0 0,0 0 0</inkml:trace>
+  <inkml:trace contextRef="#ctx0" brushRef="#br0" timeOffset="45047">4251 9843 24575,'35'0'0,"1"0"0,-1 0 0,0 0 0,0 0 0,1 0 0,7 0 0,0 0 0,-7 0 0,2 0 0,1 0 0,2 0 0,-3 0 0,-6 0 0,-1 0 0,13 0 0,-6 0 0,-18 0 0,-5 0 0,-15 15 0,0-11 0,0 12 0,0-16 0</inkml:trace>
+  <inkml:trace contextRef="#ctx0" brushRef="#br0" timeOffset="62698">3916 11906 24575,'35'0'0,"0"0"0,-7 0 0,-1 0 0,-1 0 0,-1 0 0,1 0 0,-1 0 0,14 0 0,-9 0 0,-1 0 0,8 0 0,7 0 0,-9 16 0,-16-12 0,13 12 0,-28-16 0,11 0 0,1 0 0,-12 0 0,27 0 0,-11 0 0,15 0 0,0 0 0,1 0 0,-1 0 0,0 0 0,1 0 0,-1 0 0,-16 0 0,13 0 0,-28 0 0,11 0 0,1 0 0,4 0 0,15 0 0,0 0 0,1 0 0,-1 0 0,-10 0 0,1 0 0,13 0 0,-13 0 0,-1 0 0,2 0 0,7 0 0,-7 0 0,8 15 0,-9-13 0,-1 0 0,15 14 0,-15-15 0,1-2 0,-1 1 0,0 0 0,15 0 0,0 0 0,2 0 0,-13-1 0,1 2 0,12 6 0,2 1 0,-8-6 0,-1 0 0,0 6 0,0 0 0,1-7 0,-1-2 0,-7 1 0,-1 0 0,-2 0 0,1 0 0,17 0 0,-6 0 0,-8 8 0,1 0 0,9-4 0,-13 4 0,-1-1 0,-6-7 0,13 0 0,-28 0 0,27 0 0,-6 8 0,1 0 0,17-4 0,-9 4 0,-1 0 0,2-8 0,-10 0 0,1 0 0,13 0 0,-5 0 0,-1 0 0,6 0 0,-13 0 0,-1 0 0,10 0 0,1 0 0,-1 0 0,0 0 0,0 0 0,1 0 0,-8 7 0,2 1 0,-1-6 0,-1 0 0,3 6 0,1 0 0,2-7 0,-1-2 0,6 1 0,-13 0 0,-1 0 0,-6 0 0,-3 16 0,0-12 0,-12 11 0,11-15 0,-15 0 0,0 0 0,0 16 0,0-12 0,0 11 0,0-15 0,0 0 0</inkml:trace>
+  <inkml:trace contextRef="#ctx0" brushRef="#br0" timeOffset="76017">5821 13617 24575,'35'0'0,"0"0"0,9 0 0,-1 0 0,-11 0 0,2 0 0,3 0 0,5 0 0,2 0 0,-4 0 0,-2 0 0,-1 0 0,2 0-483,2 0 0,4 0 0,0 0 0,-4 0 483,-3 0 0,-3 0 0,-2 0 311,3 0 1,-2 0-312,1 0 0,-3 0 319,7 0-319,-12 0 0,-3 0 0,-4 0 0,-4-15 990,-1 11-990,5-12 0,11 8 0,4 0 0,-10-1 0,1-1 0,6 3 0,3 0 0,-2 1 0,1-3 0,-1 2 0,3 8 0,-1-2 0,-9-6 0,-1-1 0,10 4 0,0-12 0,0 16 0,1 0 0,-1 0 0,-16 0 0,13 0 0,-13 0 0,5 0 0,3 0 0,8 0 0,1 0 0,1 0 0,0 0 0,0 0 0,-3 0 0,-8 0 0,-1 0 0,1 0 0,-1 0 0,6 0 0,18 0 0,-21 0 0,7 0 0,0 0 0,1 0 0,-1 0 0,-10 0 0,1 0 0,1 0 0,1 0 0,-1 0 0,1 0 0,5 0 0,0 0 0,-6 0 0,1 0 0,7 0 0,1 0 0,-8 0 0,-2 0 0,1 0 0,-3 0 0,12 0 0,-11 8 0,1 0 0,13-4 0,-13 3 0,-1 1 0,10 8 0,-15-12 0,11 12 0,-27-16 0,12 0 0,-1 0 0,-3 0 0,21 0 0,11 0 0,-5 0 0,3 0 0,-2 0 0,-13 0 0,8 7 0,-7 1 0,-24-4 0,12 12 0,-16 0 0,0-12 0,0 11 0,0-15 0,0 16 0,0-12 0,0 12 0,0-16 0,0 0 0,0 0 0</inkml:trace>
+  <inkml:trace contextRef="#ctx0" brushRef="#br0" timeOffset="80564">4198 14817 24575,'27'0'0,"22"0"0,-11 0 0,7 0 0,-2 0 0,-8 0 0,-1 0 0,3 0-527,6 0 0,6 0 1,-1 0-1,-4 0 527,-5 0 0,-4 0 0,1 0 0,-1 0 0,1 0 0,-1 0 225,-1 0 1,0 0 0,-1 0-226,17 0 0,-2 0 0,-9 0 0,-1 0 174,0 0 0,-2 0-174,-9 0 0,-3 0 0,16 0 0,-14 0 0,-1 0 1082,-6 0-1082,12 0 0,-27 0 0,12-16 0,0 12 0,3-12 0,6 15 0,1 2 0,13-1 0,-12 0 0,-3 0 0,-4 0 0,27 0 0,-23 0 0,8 0 0,2 0 0,5 0 0,-13 0 0,-1 0 0,11 0 0,-17 0 0,13 0 0,-28 0 0,11 16 0,-15-12 0,0 12 0,0-16 0,0 0 0,0 0 0</inkml:trace>
+  <inkml:trace contextRef="#ctx0" brushRef="#br0" timeOffset="167853">2417 6967 24575,'0'34'0,"0"-1"0,0 6 0,0 4 0,0-8 0,0 4 0,0 2 0,0-1-820,0 2 1,0 0 0,0 2 0,0 1 234,0-2 0,0 2 0,0 2 1,0-1-1,0 0 585,0-1 0,0-1 0,0 0 0,0 1 0,0 0 0,0 4 0,0 0 0,0 1 0,0-1 0,0-1 0,0-2 0,0-1 0,0 0 0,0-1 0,0 0-169,0 6 0,0-1 0,0-1 0,0 1 169,0-1 0,1-1 0,-1 0 0,-1-1 0,-3-7 0,0-1 0,-1-1 0,2 2 0,1 4 0,2 1 0,0 0 0,-2-1 84,-2-4 0,0-1 0,-1-1 1,2 2-85,2 4 0,1 1 0,1-1 0,-1 0 0,0 6 0,0-2 0,0 2 0,0-10 0,0 1 0,0-1 0,0-1-124,0 5 0,0-1 0,0-1 124,0-3 0,0 0 0,0-1 0,0-1 0,0-2 0,0 0 0,0 15 0,0 0 0,0-14 0,0 1 0,0-1 0,0 0 0,0 0 0,0 1 0,0 3 0,0 1 0,0 3 0,0 1 0,0 4 0,0 1 0,0-2 0,0-7 0,0-1 0,0 1 0,0 5-83,0-6 0,0 5 0,0 2 0,0 3 0,0-1 0,0 0 0,0-2 0,0-3 83,0 7 0,0-4 0,0-2 0,0 2 0,0 3 0,0-4 0,0 2 0,0 2 0,0 0 0,0 0 0,0-1 0,0-2 0,0 1 0,0 0 0,-1-2 0,1 0 0,0-1 0,1 1-149,2 5 1,0-1-1,1-1 1,-1 1-1,0 2 149,-2-5 0,-1 0 0,0 1 0,0 1 0,1 0 0,1-1 0,2 1 0,1 0 0,2 0 0,-1 0 0,-1-1 0,-1 0 0,-2-4 0,-2-1 0,0 0 0,0 0 0,0-1 0,2 2 0,2 1 0,2 1 0,0-1 0,0 1 0,-1 1 0,-1 0 0,-1-1 0,-3 0 0,1 1 0,-2 0 0,1 0 0,0 0 0,1-2 0,1 1 0,1-1 0,0-1 0,0 0 0,-1 1 0,1 1 0,0 0 0,-1 0 0,1 2 0,-1 0 0,0-1 0,0-1 0,0-2 0,-1 6 0,-1-2 0,-1-1 0,2-2 0,2 1-15,2-3 0,2 0 0,0-1 0,0-1 1,-2-1 14,-3 3 0,-2-2 0,0-1 0,2-1 42,3 1 0,1-1 0,-1-2-42,-4 0 0,-2-1 0,1-4 1583,-1-1 0,2-1-1583,6 13 0,1-2 3141,-4 0-3141,5-14 0,-2-1 1622,-7-6-1622,0 13 338,0-29-338,0 29 0,0 3 0,7-9 0,2 3 0,-7 4 0,-2 5 0,2 1 0,2 7 0,1 3 0,1-1 0,0-6 0,-1-1 0,0 1 0,-4 4 0,-1 0 0,3-5 0,5-3 0,-1-5 0,-6-5 0,-2-1 0,1-1 0,0-1 0,0 10 0,16 0 0,-12 1 0,4-11 0,0 1 0,-8 13 0,0-14 0,0 1 0,0 9 0,0 0 0,0-10 0,0 1 0,0 5 0,0 1 0,0 5 0,0-1 0,0 11 0,0 0 0,0-43 0,0 11 0,0-15 0,0 16 0,0-12 0,0 12 0,0-1 0,0-11 0,0 27 0,0-27 0,0 12 0</inkml:trace>
+  <inkml:trace contextRef="#ctx0" brushRef="#br0" timeOffset="170532">17039 17727 24575,'34'0'0,"0"0"0,0 0 0,8 0 0,1 0 0,5 0 0,-5 0 0,4 0 0,2 0 0,2 0 0,0 0-469,-7 0 1,1 0 0,1 0 0,1 0 0,1 0 0,1 0 0,2 0 140,-9 0 0,1 0 0,0 0 1,2 0-1,0 0 0,0 0 1,2 0-1,-1 0 0,1 0 1,0 0 53,-2 0 1,-1 0 0,1 0 0,1 0 0,-1 0 0,2 0 0,-1 0 0,1 0 0,0 0 0,1 0 0,-1 0 0,1 0 25,0 0 1,0 0-1,1 0 1,0 0 0,1 0-1,0 0 1,-1 0 0,2 0-1,-1 0 1,0 0-1,0 0 1,1 0 0,-1 0 173,-2 0 1,0 0-1,0 0 1,0 0-1,0 0 1,0 0-1,0 0 1,1 0-1,-1 0 1,1 0-1,0 0 1,0 0-1,0 0 1,0 0 73,-1 0 0,0 0 0,0 0 0,1 0 0,-1 0 0,1 0 0,0 0 0,0 0 0,-1 0 0,1 0 0,0 0 0,-1 0 0,1 0 0,-1 0 0,0 0-152,2 0 1,0 0-1,0 0 1,-1 1-1,1-1 1,-1 0-1,0 0 1,1 0-1,-1 0 1,0 0-1,0 0 1,1 0-1,-1 0 1,0-1 151,0 0 0,-1 1 0,0-1 0,0 0 0,-1 1 0,1-1 0,0 0 0,0-1 0,0 1 0,1 0 0,0-1 0,0 1 0,1-1 0,1 0-11,-4 1 0,2-1 0,0 0 0,0 0 0,2 0 0,-1-1 0,1 1 0,1-1 0,-1 1 0,-1-1 0,1 1 0,-1-1 0,0 0 0,-2 0 0,0 0 0,-1 0 0,-1-1 11,7 0 0,-2 0 0,0-1 0,-2 1 0,0-1 0,-1 0 0,0 0 0,0 0 0,0 0 0,1 0 0,0 0 0,2 0 0,-4 1 0,1 0 0,1-1 0,1 1 0,0 0 0,0-1 0,0 1 0,-1-1 0,0 1 0,-1-1 0,-1 1 0,-1-1 0,-3 0 0,-1 1 0,9-3 0,-2 1 0,-2-1 0,-2 1 0,0-1 0,-2 1 0,1 0 0,0 0 108,5 0 0,-1 1 0,0 0 1,-1 0-1,0 0 0,0 1 0,-1-1-108,4-1 0,-1 0 0,0 0 0,0 0 0,-1 0 0,1 0 197,-3 0 0,0 1 1,0-1-1,-1 0 1,1 0-1,-1 0-197,-1 0 0,0 0 0,0 0 0,-1 1 0,0-1 0,0 0 0,5-1 0,0 0 0,-1 0 0,1-1 0,0 1 0,1 0 0,0-1 0,1 1 0,0 0 0,-1 1 0,-1 1 0,0 1 0,0 0 0,0 1 0,-1 0 397,-4-1 0,1 1 0,-2 0 0,0 0 0,1 0-397,-3 0 0,1-1 0,-1 1 0,0 0 0,-2 0 792,4 2 0,-2 0 0,0 1 0,-1-2-792,1-1 0,0-2 0,-1 1 0,-1 1 0,5 2 0,-2 1 0,0 1 934,1-1 0,-1 0 0,-2 0-934,3 0 0,-2 0 1413,3 0 1,-2 0-1414,-9 0 0,-1 0 1054,4 0 0,1 0-1054,6 0 0,2 0 0,0 0 0,2 0 138,-7 0 0,2 0 1,1 0-139,-1-1 0,1 0 0,0 3 0,5 2 0,0 2 0,0-1 0,-2-3 0,0-2 0,-2 2 0,-2 3 0,0 1 0,1-1 0,-3-4 0,3-1 0,-1-1 0,-2 1 0,-5 0 0,-1 0 0,2 0 0,4 0 0,5 0 0,-1 0 0,-5 0 0,2 0 0,-1 0 8,-1 0 0,3 0 0,-3 0-8,0 0 0,-1 0 0,5 0 0,2 0 0,-8 0 0,2 0 0,-2 0 0,4 0 0,0 0 0,-4 0 0,1 0 0,0 0 0,7 0 0,-2 0 0,-4 1 0,-2-2 0,0-7 0,-1 0 475,-2 6 0,1 0-475,1-6 0,0 1 0,2 6 0,1 2 0,-5-1 0,2 1 0,-1-2 0,11-7 0,0 0 82,-3 6 0,-2 0-82,-4-6 0,-3 0 0,10 8 0,-8-15 0,-15 11 0,-20-28 0,-4 28 0,-12-11 0</inkml:trace>
+</inkml:ink>
+</file>
+
+<file path=ppt/ink/ink2.xml><?xml version="1.0" encoding="utf-8"?>
+<inkml:ink xmlns:inkml="http://www.w3.org/2003/InkML">
+  <inkml:definitions>
+    <inkml:context xml:id="ctx0">
+      <inkml:inkSource xml:id="inkSrc0">
+        <inkml:traceFormat>
+          <inkml:channel name="X" type="integer" min="-2.14748E9" max="2.14748E9" units="cm"/>
+          <inkml:channel name="Y" type="integer" min="-2.14748E9" max="2.14748E9" units="cm"/>
+          <inkml:channel name="F" type="integer" max="32767" units="dev"/>
+        </inkml:traceFormat>
+        <inkml:channelProperties>
+          <inkml:channelProperty channel="X" name="resolution" value="1000" units="1/cm"/>
+          <inkml:channelProperty channel="Y" name="resolution" value="1000" units="1/cm"/>
+          <inkml:channelProperty channel="F" name="resolution" value="0" units="1/dev"/>
+        </inkml:channelProperties>
+      </inkml:inkSource>
+      <inkml:timestamp xml:id="ts0" timeString="2026-07-02T20:13:06.743"/>
+    </inkml:context>
+    <inkml:brush xml:id="br0">
+      <inkml:brushProperty name="width" value="0.05292" units="cm"/>
+      <inkml:brushProperty name="height" value="0.05292" units="cm"/>
+      <inkml:brushProperty name="color" value="#FF0000"/>
+    </inkml:brush>
+  </inkml:definitions>
+  <inkml:trace contextRef="#ctx0" brushRef="#br0">11906 6191 24575,'26'0'0,"-1"0"0,2 0 0,1 0 0,14 0 0,2 0 0,1 0 0,0 0 0,-10 0 0,1 0 0,-1 0 0,1 0 0,-1 0 0,0 0 0,11 0 0,-2 0 0,0 0 0,-1 0 0,-12 0 0,0 0 0,4-1 0,-1 2 0,-3 7 0,1 0 0,2-7 0,2 2 0,7 13 0,0-1 0,-5-13 0,-1 0 0,6 14 0,0-1 0,-7-13 0,-1 0 0,0 14 0,0 0 0,-7-15 0,-1 2 0,0 13 0,-3-1 0,-4-11 0,-5 12 0,-15-16 0,16 15 0,-12-11 0,12 12 0,-16-16 0,0 0 0</inkml:trace>
+  <inkml:trace contextRef="#ctx0" brushRef="#br0" timeOffset="2865">20055 5239 24575,'34'0'0,"-1"0"0,-1 0 0,3 0 0,2 0 0,4 0 0,0 0-794,-2 0 1,-1 0-1,3 0 794,-4 0 0,3 0 0,0 0 0,0 0 0,0 0 0,0 0 0,0 0 0,0 0 0,0 0 0,1 0 0,-1 0 0,0 0 0,1 0 0,0 0 0,1 0 0,-1 0-359,-2 0 0,0 0 0,1 0 0,0 0 359,6 0 0,0 0 0,1 0 0,-1 0 0,-5 0 0,0 0 0,0 0 0,0 0 0,6 0 0,1-1 0,0 1 0,-3 1 0,5 1 0,-3 1 0,1 0-22,-7-3 0,2-1 0,-2 1 1,-1 3 21,4 4 0,-2 2 0,-1-2-54,-2-5 1,0-2 0,-3 2 53,9 6 0,-4 0 523,-5-8 0,-1 0-523,0-1 0,1 2 0,6 6 0,2 1 0,0-6 0,2 0 0,-11 3 0,0 1 0,1-1 401,-1-4 1,0-1 0,1-1-402,1 0 0,1 1 0,0 1 0,-2 3 0,-1 3 0,2-2 0,2-4 0,2 0 0,1-1 0,-3 2 0,1 2 0,-2 2 0,1-1 0,-2 0 0,1-1 0,1 0 0,0-1 0,0-2 0,0 0 0,0-1 0,-3 2 0,1 3 0,-1 1 0,1-1 0,-1-4 0,3-1 0,0-1 0,-2 1 0,2 0 0,-1 0 0,-2 0 0,12 0 0,-2 0 545,-1-2 1,-3 4-546,-15 5 0,-3 1 192,11-4-192,-15 12 0,27-16 0,-24 0 265,2 0 0,1 0-265,9 0 0,1 0 0,-11 0 0,1 0 0,13 0 0,-7 0 0,2 0 0,-6 0 0,-1 0 0,1 0 0,-1 0 0,16 0 0,6 0 0,-2 0 0,-7 0 0,7 0 0,-44 0 0,13 0 0,-16 0 0,-16 0 0,13 0 0,-13 0 0</inkml:trace>
+  <inkml:trace contextRef="#ctx0" brushRef="#br0" timeOffset="19871">1905 6791 24575,'0'35'0,"0"-3"0,0 3 0,0 8 0,0 4-553,0-10 1,0 3-1,0 1 553,0-4 0,0 2 0,0 1 0,0-2-413,0 8 0,0-1 1,0 2 412,0-5 0,0 2 0,0 0 0,0-2 0,0 7 0,0-1 0,0 0 0,0-9 0,0 1 0,0-1 0,0 0 0,0 6 0,0-1 0,0 0 227,0 2 1,0 0 0,0 1-228,0-6 0,0 0 0,0 1 0,0-1 0,0 9 0,0 0 0,0-1 0,0 0 0,0 0 0,0-6 0,0-5 0,0-5 0,0 14 787,0-43-787,0 27 1426,0-27-1426,0 12 0,0-1 0,0-11 0,0 12 0,0-1 0,0 5 0,0 15 0,0-9 0,0-1 0,0 15 0,0-14 0,0-2 0,0 4 0,0 5 0,0-21 0,0 4 0,0-16 0,0 0 0</inkml:trace>
+  <inkml:trace contextRef="#ctx0" brushRef="#br0" timeOffset="28606">2981 12823 24575,'35'0'0,"4"0"0,5 0 0,-12 0 0,1 0 0,3 0-820,5 0 1,2 0 0,3 0 0,-1 0 647,1 0 1,0 0 0,2 0 0,0 0-184,-4 1 1,2-1-1,0 1 1,0-1 0,-1-2 354,-1 0 0,-1 0 0,0-2 0,0 0 0,0 1 0,-2-1 0,0 0 0,0 0 0,0 0 0,-1 0-78,8 0 1,1-1-1,-2 1 1,-1-2 77,-7-2 0,-1-1 0,0 0 0,0 3-138,1 4 0,1 2 0,-1 1 0,0-4 138,9-6 0,-2-4 0,1 4 0,-5 6 0,-1 3 0,1-1 0,1-4 0,0-1 0,0 1 0,-1 5 0,-1 1 0,0-2 0,3-3 0,0-2 0,1 1 82,-7 3 0,2 3 0,-1-2 1,1-1-83,0-5 0,0-2 0,0 0 0,1 2 0,2 5 0,2 1 0,-1 2 0,0-3 0,-1-1 0,-1-2 0,0 1 0,0 1 0,-3 2 0,0 1 0,0 0 0,2 1 0,1-1 0,2 0 0,0 0 0,-1 0 0,-4 0 0,4 0 0,-3 0 0,3 0 0,1 0 0,5 0 0,-3 0 0,-5 0 1058,-3 0 1,-2 0-1059,3 0 0,2 0 0,-3 0 0,-6 1 0,-1-2 889,13-7 1,2 0-890,-11 6 0,-2 0 359,1-6 1,-1 1-360,1 6 0,3 2 0,12-1 0,0 0 0,-18 0 0,0 0 0,5 0 0,4 0 0,2 0 0,-5 0 0,2 0 0,0 0 0,-1 0 0,2-1 0,0 1 0,1 1 94,2 1 0,2 2 0,1 0 1,-3 1-95,-1 1 0,-1 0 0,-1 2 0,4 3 0,0 2 0,1-2 0,2-3 0,1-2 0,-2 0 0,-3 0 0,-2-1 0,1-1-174,-1-3 0,0-1 1,-2-1 173,-3 1 0,-1 0 0,0 0 0,0 0 0,1 0 0,-1 0 0,3 0 0,0 0 0,0 0 0,-2 0 0,-1 0 0,2 0 0,5 0 0,2-1 0,-1 2 0,-6 4 0,-2 1 0,3-1 0,6-3 0,2-2 0,1 2 0,-8 1 0,0 2 0,1 0 0,-1-2 0,6-2 0,-1-2 0,0 1 0,0 0 0,0 0 0,-3 0 0,4 0 0,-5 0 0,7 0 0,-21 0 0,-1 0 0,10 0 0,0 0 1240,-15 0-1240,11 0 556,-11 0-556,15 0 0,-4 0 0,5 0 0,1 0 0,5 0 0,0 0 0,2 0 0,0 0 0,1 0-207,-6 0 1,2 0 0,-2 0-1,-1 0 207,2 0 0,-2 0 0,-2 0 0,10 0 0,-4 0 0,-9-2 0,-3 4 0,5 13 0,-19-11 0,-16 12 0,0-16 0,0 0 0</inkml:trace>
+  <inkml:trace contextRef="#ctx0" brushRef="#br0" timeOffset="34941">8661 14923 24575,'25'0'0,"1"0"0,0 0 0,3 0 0,13 0 0,2 0 0,-11 0 0,0 0 0,10 0 0,-1 0 0,-11 0 0,0 0 0,12 1 0,1-2 0,-8-7 0,2 0 0,-5 6 0,2 2 0,-1-2 0,11-6 0,0 0 0,-10 7 0,0 2 0,1-1 0,-1 0 0,1 0 0,-1 0 0,0 0 0,1 0 0,-1 0 0,14 0 0,0 0 0,-5 1 0,0-2 0,3-6 0,0-1 0,-9 6 0,-2 0 0,0-6 0,-1 0 0,-1 7 0,-1 2 0,-6-1 0,0 0 0,9 0 0,-1 0 0,-7 0 0,-1 0 0,-1 0 0,-1 0 0,10 0 0,0 0 0,-15 0 0,11 0 0,-11 0 0,15 0 0,1 0 0,-1 0 0,0 0 0,8 0 0,-6 0 0,7 0 0,-9 0 0,-10 0 0,1 0 0,13 0 0,-4 0 0,-3 0 0,-28 0 0,11 0 0,-15 0 0,0 0 0,0 0 0</inkml:trace>
+  <inkml:trace contextRef="#ctx0" brushRef="#br0" timeOffset="42877">8555 16792 24575,'43'0'0,"0"0"0,-4 0 0,2 0 0,1 0 0,2 0 0,2 0 0,1 0-688,-8 0 0,1 0 0,0 0 0,0 0 688,10 0 0,-1 0 0,1 0 0,-3 0 0,-1 0 0,2 0 0,-10 0 0,1 0 0,1 0 0,-1 0 0,1 1 0,0-1 0,1 0 0,-1-1 0,2-2 0,0-1 0,0-1 0,1 2 0,0 2 0,1 2 0,0-2 0,-1-2 0,0-7 0,-1-4 0,0 1 0,0 3 0,-2 6 0,1 4 0,-1-1 0,-1-2 0,10-10 0,-2-2 0,-2 4 256,-8 8 0,-2 4 0,-1-1-256,11-4 0,-3 0 238,-5 5 1,-4-2-239,6-15 0,0 12 0,-37-12 1420,22 16-1420,-20 0 87,12 0-87,-16 0 0,15 0 0,-11 0 0,43 16 0,-8-12 0,-5 8 0,3 0 0,-1-12 0,-1 2 0,-7 9 0,-2 1 0,2-11 0,-5 2 0,-3 28 0,-4-27 0,-16 12 0,0-16 0,0 0 0,0 0 0</inkml:trace>
+</inkml:ink>
+</file>
+
+<file path=ppt/ink/ink3.xml><?xml version="1.0" encoding="utf-8"?>
+<inkml:ink xmlns:inkml="http://www.w3.org/2003/InkML">
+  <inkml:definitions>
+    <inkml:context xml:id="ctx0">
+      <inkml:inkSource xml:id="inkSrc0">
+        <inkml:traceFormat>
+          <inkml:channel name="X" type="integer" min="-2.14748E9" max="2.14748E9" units="cm"/>
+          <inkml:channel name="Y" type="integer" min="-2.14748E9" max="2.14748E9" units="cm"/>
+          <inkml:channel name="F" type="integer" max="32767" units="dev"/>
+        </inkml:traceFormat>
+        <inkml:channelProperties>
+          <inkml:channelProperty channel="X" name="resolution" value="1000" units="1/cm"/>
+          <inkml:channelProperty channel="Y" name="resolution" value="1000" units="1/cm"/>
+          <inkml:channelProperty channel="F" name="resolution" value="0" units="1/dev"/>
+        </inkml:channelProperties>
+      </inkml:inkSource>
+      <inkml:timestamp xml:id="ts0" timeString="2026-07-02T20:14:52.439"/>
+    </inkml:context>
+    <inkml:brush xml:id="br0">
+      <inkml:brushProperty name="width" value="0.05292" units="cm"/>
+      <inkml:brushProperty name="height" value="0.05292" units="cm"/>
+      <inkml:brushProperty name="color" value="#FF0000"/>
+    </inkml:brush>
+  </inkml:definitions>
+  <inkml:trace contextRef="#ctx0" brushRef="#br0">2840 6826 24575,'19'0'0,"13"0"0,-13 0 0,5 0 0,3 0 0,0 0 0,1 0 0,7 1 0,1-2 0,0-6 0,-2-1 0,-6 6 0,-1 0 0,3-6 0,-1 0 0,-3 7 0,1 2 0,4-1 0,1 0 0,-5 0 0,1 0 0,-2 0 0,-1 0 0,10 0 0,0 0 0,0 0 0,1 0 0,-17 0 0,13 0 0,-13 0 0,16 0 0,1 0 0,-1 0 0,0 0 0,1 0 0,-1 0 0,0 0 0,0 0 0,1 0 0,-11 0 0,1 0 0,13 0 0,-14 0 0,1 0 0,9 0 0,8 0 0,-6 0 0,7 0 0,-9 0 0,0 0 0,-15 0 0,11 0 0,-11 0 0,-1 0 0,13 0 0,-28 0 0,27 0 0,-27 0 0,27 0 0,-11 0 0,-1 0 0,13 0 0,-13 0 0,17 0 0,-1 16 0,0-12 0,0 11 0,-15-15 0,-4 0 0,-1 0 0,-11 0 0,12 0 0,0 0 0,3 0 0,7-1 0,-1 2 0,-1 15 0,23-12 0,-28 12 0,17-1 0,-1-11 0,-8 12 0,-9-16 0,6 0 0,-5 0 0,16 0 0,-15 0 0,11 0 0,-11 0 0,15 0 0,1 0 0,-17 15 0,12-11 0,-11 12 0,15-16 0,-9 0 0,-1 0 0,14 0 0,-5 0 0,-1 0 0,6 0 0,-13 0 0,-1 0 0,11 0 0,-1 0 0,0 0 0,0 16 0,1-12 0,-1 11 0,0-15 0,-9 0 0,-1 0 0,7 0 0,17 0 0,-22 0 0,8 0 0,1 0 0,-17 0 0,-3 16 0,-1-12 0,-11 12 0,12-16 0,-16 0 0,0 15 0,0-11 0,0 12 0,0-16 0</inkml:trace>
+  <inkml:trace contextRef="#ctx0" brushRef="#br0" timeOffset="42283">3052 10178 24575,'35'0'0,"-11"0"0,3 0 0,7 0 0,2 0 0,-3 0 0,1 0 0,8-8 0,0 0 0,-10 6 0,-1 0 0,4-6 0,1 0 0,-1 8 0,0 0 0,0-7 0,1-1 0,-1 6 0,0 0 0,-7-6 0,-1 0 0,7 8 0,-1 0 0,6-16 0,-6 14 0,1 0 0,5-13 0,-6 13 0,0 4 0,7-2 0,-7 0 0,0 0 0,6 0 0,4 0 0,6 0 0,-17 0 0,1-8 0,0 0 0,7 4 0,-15-4 0,1 1 0,9 7 0,0 0 0,0 0 0,1 0 0,-17 0 0,13 0 0,-28 0 0,27 0 0,4 0 0,4 0 0,-13 0 0,-1 0 0,11 0 0,-11 0 0,1 0 0,13 0 0,-7 0 0,2 0 0,-6 0 0,-1 0 0,5 0 0,-1 0 0,-4-1 0,-1 2 0,4 6 0,-1 1 0,10-4 0,-6 12 0,1-1 0,-7-12 0,1-2 0,-1 8 0,0-2 0,-1-6 0,-1-2 0,11 1 0,-1 0 0,0 0 0,-10 0 0,1 0 0,13 0 0,-12 0 0,-3 0 0,-4 0 0,11 0 0,-11 0 0,15 0 0,0 0 0,-9 0 0,-1 0 0,15 0 0,-8 0 0,2 0 0,13 0 0,-21 0 0,1 0 0,3 0 0,-1 0 0,10 0 0,-14 8 0,1 0 0,0-6 0,-1 0 0,14 13 0,-14-14 0,1-2 0,0 1 0,-1 0 0,14 0 0,-14 8 0,1 0 0,0-6 0,-1 0 0,14 14 0,-14-15 0,1-2 0,0 1 0,-1 0 0,15 0 0,-8 0 0,2 0 0,-6 0 0,-1 0 0,5 0 0,-1 0 0,-5 0 0,1 0 0,2 0 0,1 0 0,5 0 0,0 0 0,-5 0 0,-1 0 0,4 0 0,1 0 0,-8 0 0,-2 0 0,16 0 0,-15 0 0,1 0 0,9 0 0,0 0 0,0 0 0,1 0 0,-17 0 0,13 0 0,-13 0 0,17 0 0,-11 0 0,1 0 0,13 0 0,-14 0 0,1 0 0,9 0 0,0 0 0,1 0 0,-9 0 0,-9 0 0,-11 0 0,-7 0 0,16 0 0,-12 0 0,12 0 0,-1 0 0,-11 0 0,12 15 0,-16-11 0,0 12 0,0-16 0</inkml:trace>
+  <inkml:trace contextRef="#ctx0" brushRef="#br0" timeOffset="51832">3316 10777 24575,'0'26'0,"0"-1"0,0 12 0,0 5 0,0-3 0,0 3 0,0 0-990,0 3 1,0 0-1,0 2 990,0-5 0,0 1 0,0 1 0,0 0 0,0 0 0,0 0 0,0 1 0,0-2 0,0-1 0,0-2 0,0 1 0,0 1 0,0 3 0,0 1 0,0-1 0,0-1 0,0 5 0,0-2 0,0 0 0,0 3 0,0 0 0,0-1 67,0-6 1,1-2 0,-2 1-68,-1 3 0,-1 1 0,0 0 0,2-4 0,1 0 0,-1-1 0,-1 1 0,0 0 0,-2 0 0,-1 1 0,-1 1 0,2-2 0,2 5 0,0-2 327,-6 4 0,0-4-327,8-16 0,0-3 0,0 9 0,0-3 1496,0-28-1496,0 11 616,0-15-616,16 16 0,-12-12 0,19 12 0,11-1 0,-12-5 0,3 0 0,15 7 0,6 1 0,-7-6 0,2 0 0,0-1-385,1 1 1,1 0-1,2 0 385,-4-3 0,3 0 0,0-1 0,-1 1-449,-2 0 1,-2 0-1,1 0 1,1-1 448,4 2 0,1-1 0,1 0 0,-1-1 0,-1-3 0,-1 0 0,1-1 0,0 1 0,0 3 0,1 1 0,0-1 0,1-1 0,1-5 0,0-3 0,0 1 0,0 2 0,-2 5 0,-1 2 0,0 0 0,-1-2 0,-1-5 0,-1-1 0,0-2 0,0 3-207,-3 1 0,1 2 1,-2-1-1,0-1 207,2-2 0,-2-1 0,1-1-95,2 1 0,0 0 0,-1 0 95,6 0 0,-2 0 490,0 0 0,-2 0-490,-7 0 0,1 0 0,7 0 0,0 0 890,-6 0 0,0 0-890,10 0 0,0 0 0,-3 0 0,1 0 0,4 1 0,0-2 0,-5-6 0,2-1 0,-12 6 0,1 2 0,-2-2 0,4-6 0,0 0 0,-4 7 0,1 3 0,1-3 138,0-3 0,0-3 1,1 2-139,0 4 0,0 0 0,2 0 0,4-4 0,1-1 0,1 1-326,2-1 1,1 0 0,-1 2 325,0 3 0,-1 1 0,1-3 0,-7-3 0,1-2 0,-1-1 0,0 1 0,9 1 0,-2 2 0,1-3 0,1-3 0,-1-2 0,-1 2 0,-3 4 0,-2 1 0,1-1-198,1-3 1,1-1 0,-2 1 197,-5 3 0,-2 2 0,1-3 0,2-2 0,0-2 0,0-1 0,-3 2 0,0 0 0,0-2 0,1-3 0,-2-1 0,2-1 0,4 0 0,1 0 0,0-1 0,-5 1 0,0 0 0,1-1 0,-3 3 0,1-2 0,0 1 0,-1 2 0,3-1 0,0 1 0,-2-1 0,-1-7 0,-2-1 0,0 2 0,2 5 0,1 3 0,-4-2-84,3-10 0,-1 1 84,0 12 0,2 2 0,-1 0 0,4-7 0,-2 0 244,8 1 0,-1-1-244,-15 0 0,-2 1 648,1 6 1,-3 2-649,12-6 645,-17 15-645,-3 0 191,-16-16-191,-16 12 0,7-16 0,-1-7 0,-6 1 0,-4-3 0,-1-3 0,-2-3 0,1-4-622,7 3 1,1-4 0,1 0-1,-4-1 622,-1 7 0,-3 1 0,-1-1 0,0-1 0,3-1 0,2-4 0,3-3 0,0 0 0,0 1 0,-1 0 0,-2 4 0,-1-1 0,0 2 0,0 0 0,2 0 0,1-4 0,1 0 0,1 1 0,1 1-68,-4-3 1,1 1-1,2 3 68,3-7 0,3 4 0,2 12 0,2 3 0,2 0 0,2 1 0,-1-10 0,-16-1 2458,12 1-2458,-11-8 115,14 17 1,2-1-116,-1-4 0,0-1 0,0-3 0,0 0 0,0-1 0,0 1 0,1 6 0,-2 3 0,-15-9 0,12 4 0,-12 27 0,16-12 0,0 16 0,0-16 0,-15-3 0,11-17 0,-12 1 0,16 0 0,-16 15 0,12-11 0,-11 27 0,-1-12 0,-3 1 0,-17 11 0,1-12 0,10 7 0,-1 2 0,-13 3 0,13-4 0,1 1 0,-10 7 0,15 0 0,4 0 0,1 0 0,-5 0 0,-15 0 0,10-1 0,-1 2 0,-1 6 0,-1 1 0,-15 2 0,0 0 0,13 0 0,1 0 0,-13-1 0,2-3 0,0-6 0,-3 0 0,10 0 0,6 0 0,-9 0 0,1 0 0,0 0 0,9 0 0,1 0 0,-14 0 0,13 0 0,1 0 0,-1 0 0,1 0 0,-15 0 0,15 0 0,-1 0 0,-9 0 0,0 0 0,0 0 0,-1 0 0,11-1 0,-1 2 0,-13 15 0,6-14 0,0 0 0,-7 14 0,8-15 0,-2-2 0,-13 1 0,13 0 0,-1 0 0,-4 0 0,0 0 0,2 0 0,-1 0 0,5 0 0,-2 0 0,1 0 0,-3 0 0,0 0 0,-6 0 0,0 0 0,7 0 0,1 0 0,0 0 0,-1 0 0,1 0 0,0 0 0,0 0 0,-1 0 0,1 0 0,0 0 0,0 0 0,-1 0 0,-3 0 0,0 0 0,3 0 0,-1 0 0,-10-8 0,0 0 0,10 7 0,0-2 0,-6-13 0,0 1 0,-1 13 0,1 0 0,6-14 0,0 0 0,-6 14 0,0 0 0,7-13 0,1-1 0,0 13 0,0 2 0,-1-7 0,1 0 0,-1 8 0,1 0 0,3 0 0,2 0 0,3 1 0,1-2 0,-4-6 0,1-1 0,-10 4 0,5-12 0,1 1 0,-6 11 0,6-12 0,-1 0 0,7 14 0,-1 0 0,-7-13 0,0-1 0,7 13 0,1 2 0,-7-7 0,1 0 0,-6 8 0,14 0 0,-1 0 0,-9 0 0,0 0 0,-1 0 0,17 0 0,3 0 0,0 0 0,12 0 0,-27 0 0,-4 0 0,-12 16 0,12-15 0,1 2 0,10 12 0,1 1 0,-3-5 0,1-2 0,-10 11 0,15 11 0,-11-27 0,27 11 0,-12-15 0,16 0 0,-15 0 0,-5 16 0,-4-6 0,-3 0 0,0-1 0,-1 1 0,-6 6 0,-2 0 0,0-6 0,1-1 0,7 1 0,1 0 0,0-1 0,3-2 0,5-7 0,3 0 0,0 15 0,-19-11 0,9 10 0,-3 4 0,-9-1 0,-2 1 0,3 1 0,1 1 0,4-2 0,2-1 0,2 1 0,5-4 0,3-10 0,4 11 0,32-15 0,-12 0 0,12 0 0</inkml:trace>
+</inkml:ink>
 </file>
 
 <file path=ppt/slideLayouts/slideLayout1.xml><?xml version="1.0" encoding="utf-8"?>
@@ -5898,7 +6022,15 @@
             </a:pPr>
             <a:r>
               <a:rPr lang="en-CA" dirty="0"/>
-              <a:t>   quicksort(A, p + 1, h)    // sort right of pivot</a:t>
+              <a:t>   quicksort(A, p + 1</a:t>
+            </a:r>
+            <a:r>
+              <a:rPr lang="en-CA"/>
+              <a:t>, hi)   // </a:t>
+            </a:r>
+            <a:r>
+              <a:rPr lang="en-CA" dirty="0"/>
+              <a:t>sort right of pivot</a:t>
             </a:r>
           </a:p>
           <a:p>
@@ -6130,6 +6262,57 @@
           </a:p>
         </p:txBody>
       </p:sp>
+      <mc:AlternateContent xmlns:mc="http://schemas.openxmlformats.org/markup-compatibility/2006">
+        <mc:Choice xmlns:p14="http://schemas.microsoft.com/office/powerpoint/2010/main" Requires="p14">
+          <p:contentPart p14:bwMode="auto" r:id="rId2">
+            <p14:nvContentPartPr>
+              <p14:cNvPr id="9" name="Ink 8">
+                <a:extLst>
+                  <a:ext uri="{FF2B5EF4-FFF2-40B4-BE49-F238E27FC236}">
+                    <a16:creationId xmlns:a16="http://schemas.microsoft.com/office/drawing/2014/main" id="{F791F199-4178-0658-0B12-A2FDF00F21DA}"/>
+                  </a:ext>
+                </a:extLst>
+              </p14:cNvPr>
+              <p14:cNvContentPartPr/>
+              <p14:nvPr/>
+            </p14:nvContentPartPr>
+            <p14:xfrm>
+              <a:off x="685800" y="1885680"/>
+              <a:ext cx="8350560" cy="4160160"/>
+            </p14:xfrm>
+          </p:contentPart>
+        </mc:Choice>
+        <mc:Fallback>
+          <p:pic>
+            <p:nvPicPr>
+              <p:cNvPr id="9" name="Ink 8">
+                <a:extLst>
+                  <a:ext uri="{FF2B5EF4-FFF2-40B4-BE49-F238E27FC236}">
+                    <a16:creationId xmlns:a16="http://schemas.microsoft.com/office/drawing/2014/main" id="{F791F199-4178-0658-0B12-A2FDF00F21DA}"/>
+                  </a:ext>
+                </a:extLst>
+              </p:cNvPr>
+              <p:cNvPicPr/>
+              <p:nvPr/>
+            </p:nvPicPr>
+            <p:blipFill>
+              <a:blip r:embed="rId3"/>
+              <a:stretch>
+                <a:fillRect/>
+              </a:stretch>
+            </p:blipFill>
+            <p:spPr>
+              <a:xfrm>
+                <a:off x="676440" y="1876320"/>
+                <a:ext cx="8369280" cy="4178880"/>
+              </a:xfrm>
+              <a:prstGeom prst="rect">
+                <a:avLst/>
+              </a:prstGeom>
+            </p:spPr>
+          </p:pic>
+        </mc:Fallback>
+      </mc:AlternateContent>
     </p:spTree>
     <p:extLst>
       <p:ext uri="{BB962C8B-B14F-4D97-AF65-F5344CB8AC3E}">
@@ -6605,6 +6788,57 @@
           </p:sp>
         </mc:Fallback>
       </mc:AlternateContent>
+      <mc:AlternateContent xmlns:mc="http://schemas.openxmlformats.org/markup-compatibility/2006">
+        <mc:Choice xmlns:p14="http://schemas.microsoft.com/office/powerpoint/2010/main" Requires="p14">
+          <p:contentPart p14:bwMode="auto" r:id="rId3">
+            <p14:nvContentPartPr>
+              <p14:cNvPr id="5" name="Ink 4">
+                <a:extLst>
+                  <a:ext uri="{FF2B5EF4-FFF2-40B4-BE49-F238E27FC236}">
+                    <a16:creationId xmlns:a16="http://schemas.microsoft.com/office/drawing/2014/main" id="{A9CF8751-CC47-1321-C74E-71EA38474989}"/>
+                  </a:ext>
+                </a:extLst>
+              </p14:cNvPr>
+              <p14:cNvContentPartPr/>
+              <p14:nvPr/>
+            </p14:nvContentPartPr>
+            <p14:xfrm>
+              <a:off x="1022400" y="2444400"/>
+              <a:ext cx="2406960" cy="2420280"/>
+            </p14:xfrm>
+          </p:contentPart>
+        </mc:Choice>
+        <mc:Fallback>
+          <p:pic>
+            <p:nvPicPr>
+              <p:cNvPr id="5" name="Ink 4">
+                <a:extLst>
+                  <a:ext uri="{FF2B5EF4-FFF2-40B4-BE49-F238E27FC236}">
+                    <a16:creationId xmlns:a16="http://schemas.microsoft.com/office/drawing/2014/main" id="{A9CF8751-CC47-1321-C74E-71EA38474989}"/>
+                  </a:ext>
+                </a:extLst>
+              </p:cNvPr>
+              <p:cNvPicPr/>
+              <p:nvPr/>
+            </p:nvPicPr>
+            <p:blipFill>
+              <a:blip r:embed="rId4"/>
+              <a:stretch>
+                <a:fillRect/>
+              </a:stretch>
+            </p:blipFill>
+            <p:spPr>
+              <a:xfrm>
+                <a:off x="1013040" y="2435040"/>
+                <a:ext cx="2425680" cy="2439000"/>
+              </a:xfrm>
+              <a:prstGeom prst="rect">
+                <a:avLst/>
+              </a:prstGeom>
+            </p:spPr>
+          </p:pic>
+        </mc:Fallback>
+      </mc:AlternateContent>
     </p:spTree>
     <p:extLst>
       <p:ext uri="{BB962C8B-B14F-4D97-AF65-F5344CB8AC3E}">
@@ -8413,11 +8647,7 @@
             </a:r>
             <a:r>
               <a:rPr lang="en-US" dirty="0"/>
-              <a:t> are generally well-tested and efficient for many different types </a:t>
-            </a:r>
-            <a:r>
-              <a:rPr lang="en-US"/>
-              <a:t>of data</a:t>
+              <a:t> are generally well-tested and efficient for many different types of data</a:t>
             </a:r>
           </a:p>
         </p:txBody>
@@ -10693,7 +10923,7 @@
             </a:pPr>
             <a:r>
               <a:rPr lang="en-CA" dirty="0"/>
-              <a:t>    mid = n) / 2</a:t>
+              <a:t>    mid = n / 2</a:t>
             </a:r>
           </a:p>
           <a:p>
@@ -11783,6 +12013,57 @@
           </a:p>
         </p:txBody>
       </p:sp>
+      <mc:AlternateContent xmlns:mc="http://schemas.openxmlformats.org/markup-compatibility/2006">
+        <mc:Choice xmlns:p14="http://schemas.microsoft.com/office/powerpoint/2010/main" Requires="p14">
+          <p:contentPart p14:bwMode="auto" r:id="rId2">
+            <p14:nvContentPartPr>
+              <p14:cNvPr id="6" name="Ink 5">
+                <a:extLst>
+                  <a:ext uri="{FF2B5EF4-FFF2-40B4-BE49-F238E27FC236}">
+                    <a16:creationId xmlns:a16="http://schemas.microsoft.com/office/drawing/2014/main" id="{7941A223-86BC-3DB0-7A3E-7108999E783C}"/>
+                  </a:ext>
+                </a:extLst>
+              </p14:cNvPr>
+              <p14:cNvContentPartPr/>
+              <p14:nvPr/>
+            </p14:nvContentPartPr>
+            <p14:xfrm>
+              <a:off x="856800" y="1593360"/>
+              <a:ext cx="10193400" cy="4789080"/>
+            </p14:xfrm>
+          </p:contentPart>
+        </mc:Choice>
+        <mc:Fallback>
+          <p:pic>
+            <p:nvPicPr>
+              <p:cNvPr id="6" name="Ink 5">
+                <a:extLst>
+                  <a:ext uri="{FF2B5EF4-FFF2-40B4-BE49-F238E27FC236}">
+                    <a16:creationId xmlns:a16="http://schemas.microsoft.com/office/drawing/2014/main" id="{7941A223-86BC-3DB0-7A3E-7108999E783C}"/>
+                  </a:ext>
+                </a:extLst>
+              </p:cNvPr>
+              <p:cNvPicPr/>
+              <p:nvPr/>
+            </p:nvPicPr>
+            <p:blipFill>
+              <a:blip r:embed="rId3"/>
+              <a:stretch>
+                <a:fillRect/>
+              </a:stretch>
+            </p:blipFill>
+            <p:spPr>
+              <a:xfrm>
+                <a:off x="847440" y="1584000"/>
+                <a:ext cx="10212120" cy="4807800"/>
+              </a:xfrm>
+              <a:prstGeom prst="rect">
+                <a:avLst/>
+              </a:prstGeom>
+            </p:spPr>
+          </p:pic>
+        </mc:Fallback>
+      </mc:AlternateContent>
     </p:spTree>
     <p:extLst>
       <p:ext uri="{BB962C8B-B14F-4D97-AF65-F5344CB8AC3E}">
